--- a/Document/챕터0.pptx
+++ b/Document/챕터0.pptx
@@ -9,8 +9,6 @@
     <p:sldId id="279" r:id="rId3"/>
     <p:sldId id="278" r:id="rId4"/>
     <p:sldId id="280" r:id="rId5"/>
-    <p:sldId id="273" r:id="rId6"/>
-    <p:sldId id="276" r:id="rId7"/>
   </p:sldIdLst>
   <p:sldSz cx="12192000" cy="6858000"/>
   <p:notesSz cx="6858000" cy="9144000"/>
@@ -264,7 +262,7 @@
           <a:p>
             <a:fld id="{648F4243-01F6-402A-BD5A-4BF3AAF5FC46}" type="datetimeFigureOut">
               <a:rPr lang="ko-KR" altLang="en-US" smtClean="0"/>
-              <a:t>2025-09-21</a:t>
+              <a:t>2026-01-18</a:t>
             </a:fld>
             <a:endParaRPr lang="ko-KR" altLang="en-US"/>
           </a:p>
@@ -462,7 +460,7 @@
           <a:p>
             <a:fld id="{648F4243-01F6-402A-BD5A-4BF3AAF5FC46}" type="datetimeFigureOut">
               <a:rPr lang="ko-KR" altLang="en-US" smtClean="0"/>
-              <a:t>2025-09-21</a:t>
+              <a:t>2026-01-18</a:t>
             </a:fld>
             <a:endParaRPr lang="ko-KR" altLang="en-US"/>
           </a:p>
@@ -670,7 +668,7 @@
           <a:p>
             <a:fld id="{648F4243-01F6-402A-BD5A-4BF3AAF5FC46}" type="datetimeFigureOut">
               <a:rPr lang="ko-KR" altLang="en-US" smtClean="0"/>
-              <a:t>2025-09-21</a:t>
+              <a:t>2026-01-18</a:t>
             </a:fld>
             <a:endParaRPr lang="ko-KR" altLang="en-US"/>
           </a:p>
@@ -868,7 +866,7 @@
           <a:p>
             <a:fld id="{648F4243-01F6-402A-BD5A-4BF3AAF5FC46}" type="datetimeFigureOut">
               <a:rPr lang="ko-KR" altLang="en-US" smtClean="0"/>
-              <a:t>2025-09-21</a:t>
+              <a:t>2026-01-18</a:t>
             </a:fld>
             <a:endParaRPr lang="ko-KR" altLang="en-US"/>
           </a:p>
@@ -1143,7 +1141,7 @@
           <a:p>
             <a:fld id="{648F4243-01F6-402A-BD5A-4BF3AAF5FC46}" type="datetimeFigureOut">
               <a:rPr lang="ko-KR" altLang="en-US" smtClean="0"/>
-              <a:t>2025-09-21</a:t>
+              <a:t>2026-01-18</a:t>
             </a:fld>
             <a:endParaRPr lang="ko-KR" altLang="en-US"/>
           </a:p>
@@ -1408,7 +1406,7 @@
           <a:p>
             <a:fld id="{648F4243-01F6-402A-BD5A-4BF3AAF5FC46}" type="datetimeFigureOut">
               <a:rPr lang="ko-KR" altLang="en-US" smtClean="0"/>
-              <a:t>2025-09-21</a:t>
+              <a:t>2026-01-18</a:t>
             </a:fld>
             <a:endParaRPr lang="ko-KR" altLang="en-US"/>
           </a:p>
@@ -1820,7 +1818,7 @@
           <a:p>
             <a:fld id="{648F4243-01F6-402A-BD5A-4BF3AAF5FC46}" type="datetimeFigureOut">
               <a:rPr lang="ko-KR" altLang="en-US" smtClean="0"/>
-              <a:t>2025-09-21</a:t>
+              <a:t>2026-01-18</a:t>
             </a:fld>
             <a:endParaRPr lang="ko-KR" altLang="en-US"/>
           </a:p>
@@ -1961,7 +1959,7 @@
           <a:p>
             <a:fld id="{648F4243-01F6-402A-BD5A-4BF3AAF5FC46}" type="datetimeFigureOut">
               <a:rPr lang="ko-KR" altLang="en-US" smtClean="0"/>
-              <a:t>2025-09-21</a:t>
+              <a:t>2026-01-18</a:t>
             </a:fld>
             <a:endParaRPr lang="ko-KR" altLang="en-US"/>
           </a:p>
@@ -2074,7 +2072,7 @@
           <a:p>
             <a:fld id="{648F4243-01F6-402A-BD5A-4BF3AAF5FC46}" type="datetimeFigureOut">
               <a:rPr lang="ko-KR" altLang="en-US" smtClean="0"/>
-              <a:t>2025-09-21</a:t>
+              <a:t>2026-01-18</a:t>
             </a:fld>
             <a:endParaRPr lang="ko-KR" altLang="en-US"/>
           </a:p>
@@ -2385,7 +2383,7 @@
           <a:p>
             <a:fld id="{648F4243-01F6-402A-BD5A-4BF3AAF5FC46}" type="datetimeFigureOut">
               <a:rPr lang="ko-KR" altLang="en-US" smtClean="0"/>
-              <a:t>2025-09-21</a:t>
+              <a:t>2026-01-18</a:t>
             </a:fld>
             <a:endParaRPr lang="ko-KR" altLang="en-US"/>
           </a:p>
@@ -2673,7 +2671,7 @@
           <a:p>
             <a:fld id="{648F4243-01F6-402A-BD5A-4BF3AAF5FC46}" type="datetimeFigureOut">
               <a:rPr lang="ko-KR" altLang="en-US" smtClean="0"/>
-              <a:t>2025-09-21</a:t>
+              <a:t>2026-01-18</a:t>
             </a:fld>
             <a:endParaRPr lang="ko-KR" altLang="en-US"/>
           </a:p>
@@ -2914,7 +2912,7 @@
           <a:p>
             <a:fld id="{648F4243-01F6-402A-BD5A-4BF3AAF5FC46}" type="datetimeFigureOut">
               <a:rPr lang="ko-KR" altLang="en-US" smtClean="0"/>
-              <a:t>2025-09-21</a:t>
+              <a:t>2026-01-18</a:t>
             </a:fld>
             <a:endParaRPr lang="ko-KR" altLang="en-US"/>
           </a:p>
@@ -4536,1021 +4534,6 @@
 </p:sld>
 </file>
 
-<file path=ppt/slides/slide5.xml><?xml version="1.0" encoding="utf-8"?>
-<p:sld xmlns:a="http://schemas.openxmlformats.org/drawingml/2006/main" xmlns:r="http://schemas.openxmlformats.org/officeDocument/2006/relationships" xmlns:p="http://schemas.openxmlformats.org/presentationml/2006/main">
-  <p:cSld>
-    <p:spTree>
-      <p:nvGrpSpPr>
-        <p:cNvPr id="1" name="">
-          <a:extLst>
-            <a:ext uri="{FF2B5EF4-FFF2-40B4-BE49-F238E27FC236}">
-              <a16:creationId xmlns:a16="http://schemas.microsoft.com/office/drawing/2014/main" id="{428691A7-7594-E890-D58E-25F14DC7CF19}"/>
-            </a:ext>
-          </a:extLst>
-        </p:cNvPr>
-        <p:cNvGrpSpPr/>
-        <p:nvPr/>
-      </p:nvGrpSpPr>
-      <p:grpSpPr>
-        <a:xfrm>
-          <a:off x="0" y="0"/>
-          <a:ext cx="0" cy="0"/>
-          <a:chOff x="0" y="0"/>
-          <a:chExt cx="0" cy="0"/>
-        </a:xfrm>
-      </p:grpSpPr>
-      <p:sp>
-        <p:nvSpPr>
-          <p:cNvPr id="4" name="제목 1">
-            <a:extLst>
-              <a:ext uri="{FF2B5EF4-FFF2-40B4-BE49-F238E27FC236}">
-                <a16:creationId xmlns:a16="http://schemas.microsoft.com/office/drawing/2014/main" id="{80D97F0E-E21A-03FA-E719-6C0AEA56BBB8}"/>
-              </a:ext>
-            </a:extLst>
-          </p:cNvPr>
-          <p:cNvSpPr txBox="1">
-            <a:spLocks/>
-          </p:cNvSpPr>
-          <p:nvPr/>
-        </p:nvSpPr>
-        <p:spPr>
-          <a:xfrm>
-            <a:off x="130679" y="98679"/>
-            <a:ext cx="10515600" cy="590651"/>
-          </a:xfrm>
-          <a:prstGeom prst="rect">
-            <a:avLst/>
-          </a:prstGeom>
-        </p:spPr>
-        <p:txBody>
-          <a:bodyPr vert="horz" lIns="91440" tIns="45720" rIns="91440" bIns="45720" rtlCol="0" anchor="ctr">
-            <a:normAutofit/>
-          </a:bodyPr>
-          <a:lstStyle>
-            <a:lvl1pPr algn="ctr" defTabSz="914400" rtl="0" eaLnBrk="1" latinLnBrk="1" hangingPunct="1">
-              <a:lnSpc>
-                <a:spcPct val="90000"/>
-              </a:lnSpc>
-              <a:spcBef>
-                <a:spcPct val="0"/>
-              </a:spcBef>
-              <a:buNone/>
-              <a:defRPr sz="6000" kern="1200">
-                <a:solidFill>
-                  <a:schemeClr val="tx1"/>
-                </a:solidFill>
-                <a:latin typeface="+mj-lt"/>
-                <a:ea typeface="+mj-ea"/>
-                <a:cs typeface="+mj-cs"/>
-              </a:defRPr>
-            </a:lvl1pPr>
-          </a:lstStyle>
-          <a:p>
-            <a:pPr algn="l"/>
-            <a:r>
-              <a:rPr lang="ko-KR" altLang="en-US" sz="2800" b="1" dirty="0">
-                <a:latin typeface="+mn-ea"/>
-                <a:ea typeface="+mn-ea"/>
-              </a:rPr>
-              <a:t>캐릭터</a:t>
-            </a:r>
-          </a:p>
-        </p:txBody>
-      </p:sp>
-      <p:sp>
-        <p:nvSpPr>
-          <p:cNvPr id="12" name="TextBox 11">
-            <a:extLst>
-              <a:ext uri="{FF2B5EF4-FFF2-40B4-BE49-F238E27FC236}">
-                <a16:creationId xmlns:a16="http://schemas.microsoft.com/office/drawing/2014/main" id="{28B11525-5C3A-90AB-BBF8-827A40A85823}"/>
-              </a:ext>
-            </a:extLst>
-          </p:cNvPr>
-          <p:cNvSpPr txBox="1"/>
-          <p:nvPr/>
-        </p:nvSpPr>
-        <p:spPr>
-          <a:xfrm>
-            <a:off x="551088" y="981323"/>
-            <a:ext cx="11221811" cy="3539430"/>
-          </a:xfrm>
-          <a:prstGeom prst="rect">
-            <a:avLst/>
-          </a:prstGeom>
-          <a:noFill/>
-        </p:spPr>
-        <p:txBody>
-          <a:bodyPr wrap="square" rtlCol="0">
-            <a:spAutoFit/>
-          </a:bodyPr>
-          <a:lstStyle/>
-          <a:p>
-            <a:r>
-              <a:rPr lang="ko-KR" altLang="en-US" sz="1400" dirty="0"/>
-              <a:t>등장인물 </a:t>
-            </a:r>
-            <a:r>
-              <a:rPr lang="en-US" altLang="ko-KR" sz="1400" dirty="0"/>
-              <a:t>: </a:t>
-            </a:r>
-            <a:r>
-              <a:rPr lang="ko-KR" altLang="en-US" sz="1400" dirty="0"/>
-              <a:t>주인공</a:t>
-            </a:r>
-            <a:r>
-              <a:rPr lang="en-US" altLang="ko-KR" sz="1400" dirty="0"/>
-              <a:t>, </a:t>
-            </a:r>
-            <a:r>
-              <a:rPr lang="ko-KR" altLang="en-US" sz="1400" dirty="0"/>
-              <a:t>주인공친구</a:t>
-            </a:r>
-            <a:r>
-              <a:rPr lang="en-US" altLang="ko-KR" sz="1400" dirty="0"/>
-              <a:t>, </a:t>
-            </a:r>
-            <a:r>
-              <a:rPr lang="ko-KR" altLang="en-US" sz="1400" dirty="0"/>
-              <a:t>마법사</a:t>
-            </a:r>
-            <a:r>
-              <a:rPr lang="en-US" altLang="ko-KR" sz="1400" dirty="0"/>
-              <a:t>, </a:t>
-            </a:r>
-            <a:r>
-              <a:rPr lang="ko-KR" altLang="en-US" sz="1400" dirty="0" err="1"/>
-              <a:t>길드장</a:t>
-            </a:r>
-            <a:r>
-              <a:rPr lang="en-US" altLang="ko-KR" sz="1400" dirty="0"/>
-              <a:t>, </a:t>
-            </a:r>
-            <a:r>
-              <a:rPr lang="ko-KR" altLang="en-US" sz="1400" dirty="0" err="1"/>
-              <a:t>길드장친구</a:t>
-            </a:r>
-            <a:endParaRPr lang="ko-KR" altLang="en-US" sz="1400" dirty="0"/>
-          </a:p>
-          <a:p>
-            <a:endParaRPr lang="ko-KR" altLang="en-US" sz="1400" dirty="0"/>
-          </a:p>
-          <a:p>
-            <a:r>
-              <a:rPr lang="ko-KR" altLang="en-US" sz="1400" dirty="0"/>
-              <a:t>주인공 </a:t>
-            </a:r>
-            <a:r>
-              <a:rPr lang="en-US" altLang="ko-KR" sz="1400" dirty="0"/>
-              <a:t>: </a:t>
-            </a:r>
-            <a:r>
-              <a:rPr lang="ko-KR" altLang="en-US" sz="1400" dirty="0"/>
-              <a:t>주인공친구의 추천을 받아 레지스탕스에 들어간다</a:t>
-            </a:r>
-            <a:r>
-              <a:rPr lang="en-US" altLang="ko-KR" sz="1400" dirty="0"/>
-              <a:t>. </a:t>
-            </a:r>
-            <a:r>
-              <a:rPr lang="ko-KR" altLang="en-US" sz="1400" dirty="0"/>
-              <a:t>주인공친구와 죽마고우</a:t>
-            </a:r>
-            <a:r>
-              <a:rPr lang="en-US" altLang="ko-KR" sz="1400" dirty="0"/>
-              <a:t>. </a:t>
-            </a:r>
-            <a:r>
-              <a:rPr lang="ko-KR" altLang="en-US" sz="1400" dirty="0"/>
-              <a:t>길드장은 </a:t>
-            </a:r>
-            <a:r>
-              <a:rPr lang="ko-KR" altLang="en-US" sz="1400" dirty="0" err="1"/>
-              <a:t>신용하고있지만</a:t>
-            </a:r>
-            <a:r>
-              <a:rPr lang="ko-KR" altLang="en-US" sz="1400" dirty="0"/>
-              <a:t> 주인공친구처럼 </a:t>
-            </a:r>
-            <a:r>
-              <a:rPr lang="ko-KR" altLang="en-US" sz="1400" dirty="0" err="1"/>
-              <a:t>경외하고있지는</a:t>
-            </a:r>
-            <a:r>
-              <a:rPr lang="ko-KR" altLang="en-US" sz="1400" dirty="0"/>
-              <a:t> 않고 직장상사같이 대한다</a:t>
-            </a:r>
-            <a:r>
-              <a:rPr lang="en-US" altLang="ko-KR" sz="1400" dirty="0"/>
-              <a:t>. </a:t>
-            </a:r>
-            <a:r>
-              <a:rPr lang="ko-KR" altLang="en-US" sz="1400" dirty="0"/>
-              <a:t>추진력이 있으며 감정을 표현하는 것을 참지 않는다</a:t>
-            </a:r>
-            <a:r>
-              <a:rPr lang="en-US" altLang="ko-KR" sz="1400" dirty="0"/>
-              <a:t>. </a:t>
-            </a:r>
-            <a:r>
-              <a:rPr lang="ko-KR" altLang="en-US" sz="1400" dirty="0"/>
-              <a:t>이해심이 넓지만 구두쇠</a:t>
-            </a:r>
-            <a:r>
-              <a:rPr lang="en-US" altLang="ko-KR" sz="1400" dirty="0"/>
-              <a:t>.</a:t>
-            </a:r>
-          </a:p>
-          <a:p>
-            <a:endParaRPr lang="en-US" altLang="ko-KR" sz="1400" dirty="0"/>
-          </a:p>
-          <a:p>
-            <a:r>
-              <a:rPr lang="ko-KR" altLang="en-US" sz="1400" dirty="0"/>
-              <a:t>주인공친구 </a:t>
-            </a:r>
-            <a:r>
-              <a:rPr lang="en-US" altLang="ko-KR" sz="1400" dirty="0"/>
-              <a:t>(</a:t>
-            </a:r>
-            <a:r>
-              <a:rPr lang="ko-KR" altLang="en-US" sz="1400" dirty="0" err="1"/>
-              <a:t>란스</a:t>
-            </a:r>
-            <a:r>
-              <a:rPr lang="ko-KR" altLang="en-US" sz="1400" dirty="0"/>
-              <a:t> 마틸다 </a:t>
-            </a:r>
-            <a:r>
-              <a:rPr lang="ko-KR" altLang="en-US" sz="1400" dirty="0" err="1"/>
-              <a:t>마테우리</a:t>
-            </a:r>
-            <a:r>
-              <a:rPr lang="en-US" altLang="ko-KR" sz="1400" dirty="0"/>
-              <a:t>)</a:t>
-            </a:r>
-            <a:r>
-              <a:rPr lang="ko-KR" altLang="en-US" sz="1400" dirty="0"/>
-              <a:t> </a:t>
-            </a:r>
-            <a:r>
-              <a:rPr lang="en-US" altLang="ko-KR" sz="1400" dirty="0"/>
-              <a:t>: </a:t>
-            </a:r>
-            <a:r>
-              <a:rPr lang="ko-KR" altLang="en-US" sz="1400" dirty="0"/>
-              <a:t>길드장의 </a:t>
-            </a:r>
-            <a:r>
-              <a:rPr lang="ko-KR" altLang="en-US" sz="1400" dirty="0" err="1"/>
-              <a:t>카리스마있는</a:t>
-            </a:r>
-            <a:r>
-              <a:rPr lang="ko-KR" altLang="en-US" sz="1400" dirty="0"/>
-              <a:t> 모습에 이끌려 잘 따른다</a:t>
-            </a:r>
-            <a:r>
-              <a:rPr lang="en-US" altLang="ko-KR" sz="1400" dirty="0"/>
-              <a:t>. </a:t>
-            </a:r>
-            <a:r>
-              <a:rPr lang="ko-KR" altLang="en-US" sz="1400" dirty="0"/>
-              <a:t>덜렁대고 과하게 낙천적인 성격</a:t>
-            </a:r>
-            <a:r>
-              <a:rPr lang="en-US" altLang="ko-KR" sz="1400" dirty="0"/>
-              <a:t>.</a:t>
-            </a:r>
-          </a:p>
-          <a:p>
-            <a:endParaRPr lang="en-US" altLang="ko-KR" sz="1400" dirty="0"/>
-          </a:p>
-          <a:p>
-            <a:r>
-              <a:rPr lang="ko-KR" altLang="en-US" sz="1400" dirty="0"/>
-              <a:t>레지스탕스 리더 </a:t>
-            </a:r>
-            <a:r>
-              <a:rPr lang="en-US" altLang="ko-KR" sz="1400" dirty="0"/>
-              <a:t>(</a:t>
-            </a:r>
-            <a:r>
-              <a:rPr lang="ko-KR" altLang="en-US" sz="1400" dirty="0" err="1"/>
-              <a:t>메이드인어비스</a:t>
-            </a:r>
-            <a:r>
-              <a:rPr lang="ko-KR" altLang="en-US" sz="1400" dirty="0"/>
-              <a:t> </a:t>
-            </a:r>
-            <a:r>
-              <a:rPr lang="ko-KR" altLang="en-US" sz="1400" dirty="0" err="1"/>
-              <a:t>오젠</a:t>
-            </a:r>
-            <a:r>
-              <a:rPr lang="en-US" altLang="ko-KR" sz="1400" dirty="0"/>
-              <a:t>) : </a:t>
-            </a:r>
-            <a:r>
-              <a:rPr lang="ko-KR" altLang="en-US" sz="1400" dirty="0"/>
-              <a:t>철저한 악인</a:t>
-            </a:r>
-            <a:r>
-              <a:rPr lang="en-US" altLang="ko-KR" sz="1400" dirty="0"/>
-              <a:t>. </a:t>
-            </a:r>
-            <a:r>
-              <a:rPr lang="ko-KR" altLang="en-US" sz="1400" dirty="0" err="1"/>
-              <a:t>베프가</a:t>
-            </a:r>
-            <a:r>
-              <a:rPr lang="ko-KR" altLang="en-US" sz="1400" dirty="0"/>
-              <a:t> 협박에 굴하지 </a:t>
-            </a:r>
-            <a:r>
-              <a:rPr lang="ko-KR" altLang="en-US" sz="1400" dirty="0" err="1"/>
-              <a:t>않을만큼</a:t>
-            </a:r>
-            <a:r>
-              <a:rPr lang="ko-KR" altLang="en-US" sz="1400" dirty="0"/>
-              <a:t> 긍정적이고 적극적인 성격에 이끌려 </a:t>
-            </a:r>
-            <a:r>
-              <a:rPr lang="ko-KR" altLang="en-US" sz="1400" dirty="0" err="1"/>
-              <a:t>베프를</a:t>
-            </a:r>
-            <a:r>
-              <a:rPr lang="ko-KR" altLang="en-US" sz="1400" dirty="0"/>
-              <a:t> 아껴준다</a:t>
-            </a:r>
-            <a:r>
-              <a:rPr lang="en-US" altLang="ko-KR" sz="1400" dirty="0"/>
-              <a:t>. </a:t>
-            </a:r>
-            <a:r>
-              <a:rPr lang="ko-KR" altLang="en-US" sz="1400" dirty="0"/>
-              <a:t>힘든 어린시절을 보내왔고 하루하루 생존의 위협을 받기 때문에 모두를 의심하며 음흉하고 매정한 결단도 </a:t>
-            </a:r>
-            <a:r>
-              <a:rPr lang="ko-KR" altLang="en-US" sz="1400" dirty="0" err="1"/>
-              <a:t>서슴치</a:t>
-            </a:r>
-            <a:r>
-              <a:rPr lang="ko-KR" altLang="en-US" sz="1400" dirty="0"/>
-              <a:t> 않는다</a:t>
-            </a:r>
-            <a:r>
-              <a:rPr lang="en-US" altLang="ko-KR" sz="1400" dirty="0"/>
-              <a:t>. </a:t>
-            </a:r>
-            <a:r>
-              <a:rPr lang="ko-KR" altLang="en-US" sz="1400" dirty="0"/>
-              <a:t>주인공들에게 엄하게 대한다</a:t>
-            </a:r>
-            <a:r>
-              <a:rPr lang="en-US" altLang="ko-KR" sz="1400" dirty="0"/>
-              <a:t>.</a:t>
-            </a:r>
-          </a:p>
-          <a:p>
-            <a:endParaRPr lang="en-US" altLang="ko-KR" sz="1400" dirty="0"/>
-          </a:p>
-          <a:p>
-            <a:r>
-              <a:rPr lang="ko-KR" altLang="en-US" sz="1400" dirty="0"/>
-              <a:t>레지스탕스 리더 친구 </a:t>
-            </a:r>
-            <a:r>
-              <a:rPr lang="en-US" altLang="ko-KR" sz="1400" dirty="0"/>
-              <a:t>(</a:t>
-            </a:r>
-            <a:r>
-              <a:rPr lang="ko-KR" altLang="en-US" sz="1400" dirty="0" err="1"/>
-              <a:t>베프</a:t>
-            </a:r>
-            <a:r>
-              <a:rPr lang="en-US" altLang="ko-KR" sz="1400" dirty="0"/>
-              <a:t>) (</a:t>
-            </a:r>
-            <a:r>
-              <a:rPr lang="ko-KR" altLang="en-US" sz="1400" dirty="0" err="1"/>
-              <a:t>코노스바</a:t>
-            </a:r>
-            <a:r>
-              <a:rPr lang="ko-KR" altLang="en-US" sz="1400" dirty="0"/>
-              <a:t> </a:t>
-            </a:r>
-            <a:r>
-              <a:rPr lang="ko-KR" altLang="en-US" sz="1400" dirty="0" err="1"/>
-              <a:t>다크니스</a:t>
-            </a:r>
-            <a:r>
-              <a:rPr lang="en-US" altLang="ko-KR" sz="1400" dirty="0"/>
-              <a:t>) : </a:t>
-            </a:r>
-            <a:r>
-              <a:rPr lang="ko-KR" altLang="en-US" sz="1400" dirty="0"/>
-              <a:t>마법사를 이길수 있다는 절대적인 의지가 있다</a:t>
-            </a:r>
-            <a:r>
-              <a:rPr lang="en-US" altLang="ko-KR" sz="1400" dirty="0"/>
-              <a:t>. </a:t>
-            </a:r>
-            <a:r>
-              <a:rPr lang="ko-KR" altLang="en-US" sz="1400" dirty="0"/>
-              <a:t>레지스탕스의 행동대장</a:t>
-            </a:r>
-            <a:r>
-              <a:rPr lang="en-US" altLang="ko-KR" sz="1400" dirty="0"/>
-              <a:t>. </a:t>
-            </a:r>
-            <a:r>
-              <a:rPr lang="ko-KR" altLang="en-US" sz="1400" dirty="0"/>
-              <a:t>호쾌하고 방탕한 전사 스타일</a:t>
-            </a:r>
-            <a:r>
-              <a:rPr lang="en-US" altLang="ko-KR" sz="1400" dirty="0"/>
-              <a:t>.</a:t>
-            </a:r>
-          </a:p>
-          <a:p>
-            <a:endParaRPr lang="en-US" altLang="ko-KR" sz="1400" dirty="0"/>
-          </a:p>
-          <a:p>
-            <a:r>
-              <a:rPr lang="ko-KR" altLang="en-US" sz="1400" dirty="0"/>
-              <a:t>마법사 </a:t>
-            </a:r>
-            <a:r>
-              <a:rPr lang="en-US" altLang="ko-KR" sz="1400" dirty="0"/>
-              <a:t>: </a:t>
-            </a:r>
-            <a:r>
-              <a:rPr lang="ko-KR" altLang="en-US" sz="1400" dirty="0"/>
-              <a:t>레지스탕스의 주적</a:t>
-            </a:r>
-            <a:r>
-              <a:rPr lang="en-US" altLang="ko-KR" sz="1400" dirty="0"/>
-              <a:t>, </a:t>
-            </a:r>
-            <a:r>
-              <a:rPr lang="ko-KR" altLang="en-US" sz="1400" dirty="0"/>
-              <a:t>사람들을 노예처럼 착취해서 자신의 배를 불린다</a:t>
-            </a:r>
-            <a:r>
-              <a:rPr lang="en-US" altLang="ko-KR" sz="1400" dirty="0"/>
-              <a:t>. </a:t>
-            </a:r>
-            <a:r>
-              <a:rPr lang="ko-KR" altLang="en-US" sz="1400" dirty="0"/>
-              <a:t>죽음을 소생시키는 능력이 있다</a:t>
-            </a:r>
-            <a:r>
-              <a:rPr lang="en-US" altLang="ko-KR" sz="1400" dirty="0"/>
-              <a:t>.</a:t>
-            </a:r>
-          </a:p>
-          <a:p>
-            <a:r>
-              <a:rPr lang="ko-KR" altLang="en-US" sz="1400" dirty="0"/>
-              <a:t>사람들을 </a:t>
-            </a:r>
-            <a:r>
-              <a:rPr lang="ko-KR" altLang="en-US" sz="1400" dirty="0" err="1"/>
-              <a:t>실험쥐</a:t>
-            </a:r>
-            <a:r>
-              <a:rPr lang="ko-KR" altLang="en-US" sz="1400" dirty="0"/>
-              <a:t> 내지는 가축으로 생각하고 있다</a:t>
-            </a:r>
-            <a:r>
-              <a:rPr lang="en-US" altLang="ko-KR" sz="1400" dirty="0"/>
-              <a:t>. </a:t>
-            </a:r>
-            <a:endParaRPr lang="ko-KR" altLang="en-US" sz="1400" dirty="0"/>
-          </a:p>
-        </p:txBody>
-      </p:sp>
-    </p:spTree>
-    <p:extLst>
-      <p:ext uri="{BB962C8B-B14F-4D97-AF65-F5344CB8AC3E}">
-        <p14:creationId xmlns:p14="http://schemas.microsoft.com/office/powerpoint/2010/main" val="2176784064"/>
-      </p:ext>
-    </p:extLst>
-  </p:cSld>
-  <p:clrMapOvr>
-    <a:masterClrMapping/>
-  </p:clrMapOvr>
-</p:sld>
-</file>
-
-<file path=ppt/slides/slide6.xml><?xml version="1.0" encoding="utf-8"?>
-<p:sld xmlns:a="http://schemas.openxmlformats.org/drawingml/2006/main" xmlns:r="http://schemas.openxmlformats.org/officeDocument/2006/relationships" xmlns:p="http://schemas.openxmlformats.org/presentationml/2006/main">
-  <p:cSld>
-    <p:spTree>
-      <p:nvGrpSpPr>
-        <p:cNvPr id="1" name="">
-          <a:extLst>
-            <a:ext uri="{FF2B5EF4-FFF2-40B4-BE49-F238E27FC236}">
-              <a16:creationId xmlns:a16="http://schemas.microsoft.com/office/drawing/2014/main" id="{28CB6E4B-752D-FEF8-D320-10618B78E29E}"/>
-            </a:ext>
-          </a:extLst>
-        </p:cNvPr>
-        <p:cNvGrpSpPr/>
-        <p:nvPr/>
-      </p:nvGrpSpPr>
-      <p:grpSpPr>
-        <a:xfrm>
-          <a:off x="0" y="0"/>
-          <a:ext cx="0" cy="0"/>
-          <a:chOff x="0" y="0"/>
-          <a:chExt cx="0" cy="0"/>
-        </a:xfrm>
-      </p:grpSpPr>
-      <p:sp>
-        <p:nvSpPr>
-          <p:cNvPr id="4" name="제목 1">
-            <a:extLst>
-              <a:ext uri="{FF2B5EF4-FFF2-40B4-BE49-F238E27FC236}">
-                <a16:creationId xmlns:a16="http://schemas.microsoft.com/office/drawing/2014/main" id="{5776A26C-CEF8-4CE8-9D60-2E8B1CDC6EA9}"/>
-              </a:ext>
-            </a:extLst>
-          </p:cNvPr>
-          <p:cNvSpPr txBox="1">
-            <a:spLocks/>
-          </p:cNvSpPr>
-          <p:nvPr/>
-        </p:nvSpPr>
-        <p:spPr>
-          <a:xfrm>
-            <a:off x="130679" y="98679"/>
-            <a:ext cx="10515600" cy="590651"/>
-          </a:xfrm>
-          <a:prstGeom prst="rect">
-            <a:avLst/>
-          </a:prstGeom>
-        </p:spPr>
-        <p:txBody>
-          <a:bodyPr vert="horz" lIns="91440" tIns="45720" rIns="91440" bIns="45720" rtlCol="0" anchor="ctr">
-            <a:normAutofit/>
-          </a:bodyPr>
-          <a:lstStyle>
-            <a:lvl1pPr algn="ctr" defTabSz="914400" rtl="0" eaLnBrk="1" latinLnBrk="1" hangingPunct="1">
-              <a:lnSpc>
-                <a:spcPct val="90000"/>
-              </a:lnSpc>
-              <a:spcBef>
-                <a:spcPct val="0"/>
-              </a:spcBef>
-              <a:buNone/>
-              <a:defRPr sz="6000" kern="1200">
-                <a:solidFill>
-                  <a:schemeClr val="tx1"/>
-                </a:solidFill>
-                <a:latin typeface="+mj-lt"/>
-                <a:ea typeface="+mj-ea"/>
-                <a:cs typeface="+mj-cs"/>
-              </a:defRPr>
-            </a:lvl1pPr>
-          </a:lstStyle>
-          <a:p>
-            <a:pPr algn="l"/>
-            <a:r>
-              <a:rPr lang="ko-KR" altLang="en-US" sz="2800" b="1" dirty="0">
-                <a:latin typeface="+mn-ea"/>
-                <a:ea typeface="+mn-ea"/>
-              </a:rPr>
-              <a:t>캐릭터</a:t>
-            </a:r>
-          </a:p>
-        </p:txBody>
-      </p:sp>
-      <p:sp>
-        <p:nvSpPr>
-          <p:cNvPr id="12" name="TextBox 11">
-            <a:extLst>
-              <a:ext uri="{FF2B5EF4-FFF2-40B4-BE49-F238E27FC236}">
-                <a16:creationId xmlns:a16="http://schemas.microsoft.com/office/drawing/2014/main" id="{77ED72D7-F0F5-6A9F-DF4F-73EA2038363D}"/>
-              </a:ext>
-            </a:extLst>
-          </p:cNvPr>
-          <p:cNvSpPr txBox="1"/>
-          <p:nvPr/>
-        </p:nvSpPr>
-        <p:spPr>
-          <a:xfrm>
-            <a:off x="551088" y="981323"/>
-            <a:ext cx="11221811" cy="3754874"/>
-          </a:xfrm>
-          <a:prstGeom prst="rect">
-            <a:avLst/>
-          </a:prstGeom>
-          <a:noFill/>
-        </p:spPr>
-        <p:txBody>
-          <a:bodyPr wrap="square" rtlCol="0">
-            <a:spAutoFit/>
-          </a:bodyPr>
-          <a:lstStyle/>
-          <a:p>
-            <a:r>
-              <a:rPr lang="en-US" altLang="ko-KR" sz="1400" dirty="0"/>
-              <a:t>2</a:t>
-            </a:r>
-            <a:r>
-              <a:rPr lang="ko-KR" altLang="en-US" sz="1400" dirty="0"/>
-              <a:t>번시나리오</a:t>
-            </a:r>
-          </a:p>
-          <a:p>
-            <a:endParaRPr lang="ko-KR" altLang="en-US" sz="1400" dirty="0"/>
-          </a:p>
-          <a:p>
-            <a:r>
-              <a:rPr lang="ko-KR" altLang="en-US" sz="1400" dirty="0"/>
-              <a:t>주인공 </a:t>
-            </a:r>
-            <a:r>
-              <a:rPr lang="en-US" altLang="ko-KR" sz="1400" dirty="0"/>
-              <a:t>: </a:t>
-            </a:r>
-            <a:r>
-              <a:rPr lang="ko-KR" altLang="en-US" sz="1400" dirty="0"/>
-              <a:t>단검 </a:t>
-            </a:r>
-            <a:r>
-              <a:rPr lang="ko-KR" altLang="en-US" sz="1400" dirty="0" err="1"/>
-              <a:t>이도류</a:t>
-            </a:r>
-            <a:endParaRPr lang="ko-KR" altLang="en-US" sz="1400" dirty="0"/>
-          </a:p>
-          <a:p>
-            <a:r>
-              <a:rPr lang="ko-KR" altLang="en-US" sz="1400" dirty="0"/>
-              <a:t>주인공친구 </a:t>
-            </a:r>
-            <a:r>
-              <a:rPr lang="en-US" altLang="ko-KR" sz="1400" dirty="0"/>
-              <a:t>: </a:t>
-            </a:r>
-            <a:r>
-              <a:rPr lang="ko-KR" altLang="en-US" sz="1400" dirty="0" err="1"/>
-              <a:t>키만큼큰</a:t>
-            </a:r>
-            <a:r>
-              <a:rPr lang="ko-KR" altLang="en-US" sz="1400" dirty="0"/>
-              <a:t> 장검</a:t>
-            </a:r>
-          </a:p>
-          <a:p>
-            <a:r>
-              <a:rPr lang="ko-KR" altLang="en-US" sz="1400" dirty="0" err="1"/>
-              <a:t>길드장</a:t>
-            </a:r>
-            <a:r>
-              <a:rPr lang="ko-KR" altLang="en-US" sz="1400" dirty="0"/>
-              <a:t> </a:t>
-            </a:r>
-            <a:r>
-              <a:rPr lang="en-US" altLang="ko-KR" sz="1400" dirty="0"/>
-              <a:t>: </a:t>
-            </a:r>
-            <a:r>
-              <a:rPr lang="ko-KR" altLang="en-US" sz="1400" dirty="0"/>
-              <a:t>대검모드</a:t>
-            </a:r>
-            <a:r>
-              <a:rPr lang="en-US" altLang="ko-KR" sz="1400" dirty="0"/>
-              <a:t>, </a:t>
-            </a:r>
-            <a:r>
-              <a:rPr lang="ko-KR" altLang="en-US" sz="1400" dirty="0"/>
-              <a:t>맨손모드</a:t>
-            </a:r>
-          </a:p>
-          <a:p>
-            <a:r>
-              <a:rPr lang="ko-KR" altLang="en-US" sz="1400" dirty="0" err="1"/>
-              <a:t>길드장친구</a:t>
-            </a:r>
-            <a:r>
-              <a:rPr lang="ko-KR" altLang="en-US" sz="1400" dirty="0"/>
-              <a:t> </a:t>
-            </a:r>
-            <a:r>
-              <a:rPr lang="en-US" altLang="ko-KR" sz="1400" dirty="0"/>
-              <a:t>: </a:t>
-            </a:r>
-            <a:r>
-              <a:rPr lang="ko-KR" altLang="en-US" sz="1400" dirty="0" err="1"/>
-              <a:t>성검</a:t>
-            </a:r>
-            <a:endParaRPr lang="ko-KR" altLang="en-US" sz="1400" dirty="0"/>
-          </a:p>
-          <a:p>
-            <a:endParaRPr lang="ko-KR" altLang="en-US" sz="1400" dirty="0"/>
-          </a:p>
-          <a:p>
-            <a:r>
-              <a:rPr lang="ko-KR" altLang="en-US" sz="1400" dirty="0"/>
-              <a:t>마법사 </a:t>
-            </a:r>
-            <a:r>
-              <a:rPr lang="en-US" altLang="ko-KR" sz="1400" dirty="0"/>
-              <a:t>:</a:t>
-            </a:r>
-          </a:p>
-          <a:p>
-            <a:r>
-              <a:rPr lang="ko-KR" altLang="en-US" sz="1400" dirty="0"/>
-              <a:t>프리즘 </a:t>
-            </a:r>
-            <a:r>
-              <a:rPr lang="en-US" altLang="ko-KR" sz="1400" dirty="0"/>
-              <a:t>: 3</a:t>
-            </a:r>
-            <a:r>
-              <a:rPr lang="ko-KR" altLang="en-US" sz="1400" dirty="0"/>
-              <a:t>초에 한번</a:t>
-            </a:r>
-            <a:r>
-              <a:rPr lang="en-US" altLang="ko-KR" sz="1400" dirty="0"/>
-              <a:t>, 3</a:t>
-            </a:r>
-            <a:r>
-              <a:rPr lang="ko-KR" altLang="en-US" sz="1400" dirty="0" err="1"/>
-              <a:t>번중</a:t>
-            </a:r>
-            <a:r>
-              <a:rPr lang="ko-KR" altLang="en-US" sz="1400" dirty="0"/>
-              <a:t> 한번</a:t>
-            </a:r>
-            <a:r>
-              <a:rPr lang="en-US" altLang="ko-KR" sz="1400" dirty="0"/>
-              <a:t>, 33%</a:t>
-            </a:r>
-            <a:r>
-              <a:rPr lang="ko-KR" altLang="en-US" sz="1400" dirty="0"/>
-              <a:t>의 확률로 회피</a:t>
-            </a:r>
-          </a:p>
-          <a:p>
-            <a:r>
-              <a:rPr lang="ko-KR" altLang="en-US" sz="1400" dirty="0"/>
-              <a:t>가드 있음</a:t>
-            </a:r>
-          </a:p>
-          <a:p>
-            <a:r>
-              <a:rPr lang="ko-KR" altLang="en-US" sz="1400" dirty="0"/>
-              <a:t>대시 </a:t>
-            </a:r>
-            <a:r>
-              <a:rPr lang="en-US" altLang="ko-KR" sz="1400" dirty="0"/>
-              <a:t>: </a:t>
-            </a:r>
-            <a:r>
-              <a:rPr lang="ko-KR" altLang="en-US" sz="1400" dirty="0" err="1"/>
-              <a:t>하오데</a:t>
-            </a:r>
-            <a:r>
-              <a:rPr lang="ko-KR" altLang="en-US" sz="1400" dirty="0"/>
-              <a:t> 보스처럼 자취를 남기면서 매우 빠르게 이동</a:t>
-            </a:r>
-          </a:p>
-          <a:p>
-            <a:r>
-              <a:rPr lang="ko-KR" altLang="en-US" sz="1400" dirty="0" err="1"/>
-              <a:t>왼클릭</a:t>
-            </a:r>
-            <a:r>
-              <a:rPr lang="ko-KR" altLang="en-US" sz="1400" dirty="0"/>
-              <a:t> </a:t>
-            </a:r>
-            <a:r>
-              <a:rPr lang="en-US" altLang="ko-KR" sz="1400" dirty="0"/>
-              <a:t>- </a:t>
-            </a:r>
-            <a:r>
-              <a:rPr lang="ko-KR" altLang="en-US" sz="1400" dirty="0"/>
-              <a:t>추방 </a:t>
-            </a:r>
-            <a:r>
-              <a:rPr lang="en-US" altLang="ko-KR" sz="1400" dirty="0"/>
-              <a:t>: </a:t>
-            </a:r>
-            <a:r>
-              <a:rPr lang="ko-KR" altLang="en-US" sz="1400" dirty="0" err="1"/>
-              <a:t>이계로</a:t>
-            </a:r>
-            <a:r>
-              <a:rPr lang="ko-KR" altLang="en-US" sz="1400" dirty="0"/>
-              <a:t> 일시적으로 보낸다</a:t>
-            </a:r>
-          </a:p>
-          <a:p>
-            <a:r>
-              <a:rPr lang="ko-KR" altLang="en-US" sz="1400" dirty="0" err="1"/>
-              <a:t>우클릭</a:t>
-            </a:r>
-            <a:r>
-              <a:rPr lang="ko-KR" altLang="en-US" sz="1400" dirty="0"/>
-              <a:t> </a:t>
-            </a:r>
-            <a:r>
-              <a:rPr lang="en-US" altLang="ko-KR" sz="1400" dirty="0"/>
-              <a:t>- </a:t>
-            </a:r>
-            <a:r>
-              <a:rPr lang="ko-KR" altLang="en-US" sz="1400" dirty="0"/>
-              <a:t>분해 </a:t>
-            </a:r>
-            <a:r>
-              <a:rPr lang="en-US" altLang="ko-KR" sz="1400" dirty="0"/>
-              <a:t>: </a:t>
-            </a:r>
-            <a:r>
-              <a:rPr lang="ko-KR" altLang="en-US" sz="1400" dirty="0"/>
-              <a:t>원거리사슬을 던져 </a:t>
-            </a:r>
-            <a:r>
-              <a:rPr lang="ko-KR" altLang="en-US" sz="1400" dirty="0" err="1"/>
-              <a:t>타격시</a:t>
-            </a:r>
-            <a:r>
-              <a:rPr lang="ko-KR" altLang="en-US" sz="1400" dirty="0"/>
-              <a:t> </a:t>
-            </a:r>
-            <a:r>
-              <a:rPr lang="en-US" altLang="ko-KR" sz="1400" dirty="0"/>
-              <a:t>3</a:t>
-            </a:r>
-            <a:r>
-              <a:rPr lang="ko-KR" altLang="en-US" sz="1400" dirty="0" err="1"/>
-              <a:t>초동안</a:t>
-            </a:r>
-            <a:r>
-              <a:rPr lang="ko-KR" altLang="en-US" sz="1400" dirty="0"/>
-              <a:t> 이속감소</a:t>
-            </a:r>
-            <a:r>
-              <a:rPr lang="en-US" altLang="ko-KR" sz="1400" dirty="0"/>
-              <a:t>, </a:t>
-            </a:r>
-            <a:r>
-              <a:rPr lang="ko-KR" altLang="en-US" sz="1400" dirty="0"/>
-              <a:t>거리 안에 계속 </a:t>
-            </a:r>
-            <a:r>
-              <a:rPr lang="ko-KR" altLang="en-US" sz="1400" dirty="0" err="1"/>
-              <a:t>이어져있으면</a:t>
-            </a:r>
-            <a:r>
-              <a:rPr lang="ko-KR" altLang="en-US" sz="1400" dirty="0"/>
-              <a:t> 또는 이미 사슬이 걸린 적에게 데미지</a:t>
-            </a:r>
-            <a:r>
-              <a:rPr lang="en-US" altLang="ko-KR" sz="1400" dirty="0"/>
-              <a:t>, </a:t>
-            </a:r>
-            <a:r>
-              <a:rPr lang="ko-KR" altLang="en-US" sz="1400" dirty="0"/>
-              <a:t>스턴</a:t>
-            </a:r>
-          </a:p>
-          <a:p>
-            <a:r>
-              <a:rPr lang="ko-KR" altLang="en-US" sz="1400" dirty="0"/>
-              <a:t>소환 공통 </a:t>
-            </a:r>
-            <a:r>
-              <a:rPr lang="en-US" altLang="ko-KR" sz="1400" dirty="0"/>
-              <a:t>: </a:t>
-            </a:r>
-            <a:r>
-              <a:rPr lang="ko-KR" altLang="en-US" sz="1400" dirty="0"/>
-              <a:t>재발동시 </a:t>
-            </a:r>
-            <a:r>
-              <a:rPr lang="ko-KR" altLang="en-US" sz="1400" dirty="0" err="1"/>
-              <a:t>기존유닛</a:t>
-            </a:r>
-            <a:r>
-              <a:rPr lang="ko-KR" altLang="en-US" sz="1400" dirty="0"/>
-              <a:t> 사라짐</a:t>
-            </a:r>
-          </a:p>
-          <a:p>
-            <a:r>
-              <a:rPr lang="en-US" altLang="ko-KR" sz="1400" dirty="0"/>
-              <a:t>q - </a:t>
-            </a:r>
-            <a:r>
-              <a:rPr lang="ko-KR" altLang="en-US" sz="1400" dirty="0"/>
-              <a:t>분쇄하는 영혼 </a:t>
-            </a:r>
-            <a:r>
-              <a:rPr lang="en-US" altLang="ko-KR" sz="1400" dirty="0"/>
-              <a:t>: </a:t>
-            </a:r>
-            <a:r>
-              <a:rPr lang="ko-KR" altLang="en-US" sz="1400" dirty="0" err="1"/>
-              <a:t>골렘</a:t>
-            </a:r>
-            <a:r>
-              <a:rPr lang="ko-KR" altLang="en-US" sz="1400" dirty="0"/>
-              <a:t> </a:t>
-            </a:r>
-            <a:r>
-              <a:rPr lang="en-US" altLang="ko-KR" sz="1400" dirty="0"/>
-              <a:t>2</a:t>
-            </a:r>
-            <a:r>
-              <a:rPr lang="ko-KR" altLang="en-US" sz="1400" dirty="0"/>
-              <a:t>기 소환</a:t>
-            </a:r>
-          </a:p>
-          <a:p>
-            <a:r>
-              <a:rPr lang="en-US" altLang="ko-KR" sz="1400" dirty="0"/>
-              <a:t>e - </a:t>
-            </a:r>
-            <a:r>
-              <a:rPr lang="ko-KR" altLang="en-US" sz="1400" dirty="0"/>
-              <a:t>진흙 인형 </a:t>
-            </a:r>
-            <a:r>
-              <a:rPr lang="en-US" altLang="ko-KR" sz="1400" dirty="0"/>
-              <a:t>: </a:t>
-            </a:r>
-            <a:r>
-              <a:rPr lang="ko-KR" altLang="en-US" sz="1400" dirty="0" err="1"/>
-              <a:t>작은골렘</a:t>
-            </a:r>
-            <a:r>
-              <a:rPr lang="ko-KR" altLang="en-US" sz="1400" dirty="0"/>
-              <a:t> </a:t>
-            </a:r>
-            <a:r>
-              <a:rPr lang="en-US" altLang="ko-KR" sz="1400" dirty="0"/>
-              <a:t>5</a:t>
-            </a:r>
-            <a:r>
-              <a:rPr lang="ko-KR" altLang="en-US" sz="1400" dirty="0"/>
-              <a:t>기 소환</a:t>
-            </a:r>
-          </a:p>
-          <a:p>
-            <a:r>
-              <a:rPr lang="en-US" altLang="ko-KR" sz="1400" dirty="0"/>
-              <a:t>r - </a:t>
-            </a:r>
-            <a:r>
-              <a:rPr lang="ko-KR" altLang="en-US" sz="1400" dirty="0" err="1"/>
-              <a:t>이계의</a:t>
-            </a:r>
-            <a:r>
-              <a:rPr lang="ko-KR" altLang="en-US" sz="1400" dirty="0"/>
-              <a:t> 틈 </a:t>
-            </a:r>
-            <a:r>
-              <a:rPr lang="en-US" altLang="ko-KR" sz="1400" dirty="0"/>
-              <a:t>: </a:t>
-            </a:r>
-            <a:r>
-              <a:rPr lang="ko-KR" altLang="en-US" sz="1400" dirty="0"/>
-              <a:t>주기적으로 </a:t>
-            </a:r>
-            <a:r>
-              <a:rPr lang="ko-KR" altLang="en-US" sz="1400" dirty="0" err="1"/>
-              <a:t>공중유닛</a:t>
-            </a:r>
-            <a:r>
-              <a:rPr lang="ko-KR" altLang="en-US" sz="1400" dirty="0"/>
-              <a:t> </a:t>
-            </a:r>
-            <a:r>
-              <a:rPr lang="en-US" altLang="ko-KR" sz="1400" dirty="0"/>
-              <a:t>3</a:t>
-            </a:r>
-            <a:r>
-              <a:rPr lang="ko-KR" altLang="en-US" sz="1400" dirty="0"/>
-              <a:t>기 소환</a:t>
-            </a:r>
-          </a:p>
-        </p:txBody>
-      </p:sp>
-    </p:spTree>
-    <p:extLst>
-      <p:ext uri="{BB962C8B-B14F-4D97-AF65-F5344CB8AC3E}">
-        <p14:creationId xmlns:p14="http://schemas.microsoft.com/office/powerpoint/2010/main" val="3254060502"/>
-      </p:ext>
-    </p:extLst>
-  </p:cSld>
-  <p:clrMapOvr>
-    <a:masterClrMapping/>
-  </p:clrMapOvr>
-</p:sld>
-</file>
-
 <file path=ppt/theme/theme1.xml><?xml version="1.0" encoding="utf-8"?>
 <a:theme xmlns:a="http://schemas.openxmlformats.org/drawingml/2006/main" name="Office 테마">
   <a:themeElements>

--- a/Document/챕터0.pptx
+++ b/Document/챕터0.pptx
@@ -6,9 +6,10 @@
   </p:sldMasterIdLst>
   <p:sldIdLst>
     <p:sldId id="277" r:id="rId2"/>
-    <p:sldId id="279" r:id="rId3"/>
-    <p:sldId id="278" r:id="rId4"/>
-    <p:sldId id="280" r:id="rId5"/>
+    <p:sldId id="281" r:id="rId3"/>
+    <p:sldId id="279" r:id="rId4"/>
+    <p:sldId id="278" r:id="rId5"/>
+    <p:sldId id="280" r:id="rId6"/>
   </p:sldIdLst>
   <p:sldSz cx="12192000" cy="6858000"/>
   <p:notesSz cx="6858000" cy="9144000"/>
@@ -262,7 +263,7 @@
           <a:p>
             <a:fld id="{648F4243-01F6-402A-BD5A-4BF3AAF5FC46}" type="datetimeFigureOut">
               <a:rPr lang="ko-KR" altLang="en-US" smtClean="0"/>
-              <a:t>2026-01-18</a:t>
+              <a:t>2026-02-04</a:t>
             </a:fld>
             <a:endParaRPr lang="ko-KR" altLang="en-US"/>
           </a:p>
@@ -460,7 +461,7 @@
           <a:p>
             <a:fld id="{648F4243-01F6-402A-BD5A-4BF3AAF5FC46}" type="datetimeFigureOut">
               <a:rPr lang="ko-KR" altLang="en-US" smtClean="0"/>
-              <a:t>2026-01-18</a:t>
+              <a:t>2026-02-04</a:t>
             </a:fld>
             <a:endParaRPr lang="ko-KR" altLang="en-US"/>
           </a:p>
@@ -668,7 +669,7 @@
           <a:p>
             <a:fld id="{648F4243-01F6-402A-BD5A-4BF3AAF5FC46}" type="datetimeFigureOut">
               <a:rPr lang="ko-KR" altLang="en-US" smtClean="0"/>
-              <a:t>2026-01-18</a:t>
+              <a:t>2026-02-04</a:t>
             </a:fld>
             <a:endParaRPr lang="ko-KR" altLang="en-US"/>
           </a:p>
@@ -866,7 +867,7 @@
           <a:p>
             <a:fld id="{648F4243-01F6-402A-BD5A-4BF3AAF5FC46}" type="datetimeFigureOut">
               <a:rPr lang="ko-KR" altLang="en-US" smtClean="0"/>
-              <a:t>2026-01-18</a:t>
+              <a:t>2026-02-04</a:t>
             </a:fld>
             <a:endParaRPr lang="ko-KR" altLang="en-US"/>
           </a:p>
@@ -1141,7 +1142,7 @@
           <a:p>
             <a:fld id="{648F4243-01F6-402A-BD5A-4BF3AAF5FC46}" type="datetimeFigureOut">
               <a:rPr lang="ko-KR" altLang="en-US" smtClean="0"/>
-              <a:t>2026-01-18</a:t>
+              <a:t>2026-02-04</a:t>
             </a:fld>
             <a:endParaRPr lang="ko-KR" altLang="en-US"/>
           </a:p>
@@ -1406,7 +1407,7 @@
           <a:p>
             <a:fld id="{648F4243-01F6-402A-BD5A-4BF3AAF5FC46}" type="datetimeFigureOut">
               <a:rPr lang="ko-KR" altLang="en-US" smtClean="0"/>
-              <a:t>2026-01-18</a:t>
+              <a:t>2026-02-04</a:t>
             </a:fld>
             <a:endParaRPr lang="ko-KR" altLang="en-US"/>
           </a:p>
@@ -1818,7 +1819,7 @@
           <a:p>
             <a:fld id="{648F4243-01F6-402A-BD5A-4BF3AAF5FC46}" type="datetimeFigureOut">
               <a:rPr lang="ko-KR" altLang="en-US" smtClean="0"/>
-              <a:t>2026-01-18</a:t>
+              <a:t>2026-02-04</a:t>
             </a:fld>
             <a:endParaRPr lang="ko-KR" altLang="en-US"/>
           </a:p>
@@ -1959,7 +1960,7 @@
           <a:p>
             <a:fld id="{648F4243-01F6-402A-BD5A-4BF3AAF5FC46}" type="datetimeFigureOut">
               <a:rPr lang="ko-KR" altLang="en-US" smtClean="0"/>
-              <a:t>2026-01-18</a:t>
+              <a:t>2026-02-04</a:t>
             </a:fld>
             <a:endParaRPr lang="ko-KR" altLang="en-US"/>
           </a:p>
@@ -2072,7 +2073,7 @@
           <a:p>
             <a:fld id="{648F4243-01F6-402A-BD5A-4BF3AAF5FC46}" type="datetimeFigureOut">
               <a:rPr lang="ko-KR" altLang="en-US" smtClean="0"/>
-              <a:t>2026-01-18</a:t>
+              <a:t>2026-02-04</a:t>
             </a:fld>
             <a:endParaRPr lang="ko-KR" altLang="en-US"/>
           </a:p>
@@ -2383,7 +2384,7 @@
           <a:p>
             <a:fld id="{648F4243-01F6-402A-BD5A-4BF3AAF5FC46}" type="datetimeFigureOut">
               <a:rPr lang="ko-KR" altLang="en-US" smtClean="0"/>
-              <a:t>2026-01-18</a:t>
+              <a:t>2026-02-04</a:t>
             </a:fld>
             <a:endParaRPr lang="ko-KR" altLang="en-US"/>
           </a:p>
@@ -2671,7 +2672,7 @@
           <a:p>
             <a:fld id="{648F4243-01F6-402A-BD5A-4BF3AAF5FC46}" type="datetimeFigureOut">
               <a:rPr lang="ko-KR" altLang="en-US" smtClean="0"/>
-              <a:t>2026-01-18</a:t>
+              <a:t>2026-02-04</a:t>
             </a:fld>
             <a:endParaRPr lang="ko-KR" altLang="en-US"/>
           </a:p>
@@ -2912,7 +2913,7 @@
           <a:p>
             <a:fld id="{648F4243-01F6-402A-BD5A-4BF3AAF5FC46}" type="datetimeFigureOut">
               <a:rPr lang="ko-KR" altLang="en-US" smtClean="0"/>
-              <a:t>2026-01-18</a:t>
+              <a:t>2026-02-04</a:t>
             </a:fld>
             <a:endParaRPr lang="ko-KR" altLang="en-US"/>
           </a:p>
@@ -3788,6 +3789,425 @@
         <p:cNvPr id="1" name="">
           <a:extLst>
             <a:ext uri="{FF2B5EF4-FFF2-40B4-BE49-F238E27FC236}">
+              <a16:creationId xmlns:a16="http://schemas.microsoft.com/office/drawing/2014/main" id="{22860CE1-9CE4-419F-A878-8236AAC927C4}"/>
+            </a:ext>
+          </a:extLst>
+        </p:cNvPr>
+        <p:cNvGrpSpPr/>
+        <p:nvPr/>
+      </p:nvGrpSpPr>
+      <p:grpSpPr>
+        <a:xfrm>
+          <a:off x="0" y="0"/>
+          <a:ext cx="0" cy="0"/>
+          <a:chOff x="0" y="0"/>
+          <a:chExt cx="0" cy="0"/>
+        </a:xfrm>
+      </p:grpSpPr>
+      <p:sp>
+        <p:nvSpPr>
+          <p:cNvPr id="4" name="제목 1">
+            <a:extLst>
+              <a:ext uri="{FF2B5EF4-FFF2-40B4-BE49-F238E27FC236}">
+                <a16:creationId xmlns:a16="http://schemas.microsoft.com/office/drawing/2014/main" id="{26C774B3-739A-50CF-AFC4-CBB369FC10AE}"/>
+              </a:ext>
+            </a:extLst>
+          </p:cNvPr>
+          <p:cNvSpPr txBox="1">
+            <a:spLocks/>
+          </p:cNvSpPr>
+          <p:nvPr/>
+        </p:nvSpPr>
+        <p:spPr>
+          <a:xfrm>
+            <a:off x="130679" y="98679"/>
+            <a:ext cx="10515600" cy="590651"/>
+          </a:xfrm>
+          <a:prstGeom prst="rect">
+            <a:avLst/>
+          </a:prstGeom>
+        </p:spPr>
+        <p:txBody>
+          <a:bodyPr vert="horz" lIns="91440" tIns="45720" rIns="91440" bIns="45720" rtlCol="0" anchor="ctr">
+            <a:normAutofit/>
+          </a:bodyPr>
+          <a:lstStyle>
+            <a:lvl1pPr algn="ctr" defTabSz="914400" rtl="0" eaLnBrk="1" latinLnBrk="1" hangingPunct="1">
+              <a:lnSpc>
+                <a:spcPct val="90000"/>
+              </a:lnSpc>
+              <a:spcBef>
+                <a:spcPct val="0"/>
+              </a:spcBef>
+              <a:buNone/>
+              <a:defRPr sz="6000" kern="1200">
+                <a:solidFill>
+                  <a:schemeClr val="tx1"/>
+                </a:solidFill>
+                <a:latin typeface="+mj-lt"/>
+                <a:ea typeface="+mj-ea"/>
+                <a:cs typeface="+mj-cs"/>
+              </a:defRPr>
+            </a:lvl1pPr>
+          </a:lstStyle>
+          <a:p>
+            <a:pPr algn="l"/>
+            <a:r>
+              <a:rPr lang="ko-KR" altLang="en-US" sz="2800" b="1" dirty="0">
+                <a:latin typeface="+mn-ea"/>
+                <a:ea typeface="+mn-ea"/>
+              </a:rPr>
+              <a:t>캐릭터 </a:t>
+            </a:r>
+            <a:r>
+              <a:rPr lang="en-US" altLang="ko-KR" sz="2800" b="1" dirty="0">
+                <a:latin typeface="+mn-ea"/>
+                <a:ea typeface="+mn-ea"/>
+              </a:rPr>
+              <a:t>- </a:t>
+            </a:r>
+            <a:r>
+              <a:rPr lang="ko-KR" altLang="en-US" sz="2800" b="1" dirty="0">
+                <a:latin typeface="+mn-ea"/>
+                <a:ea typeface="+mn-ea"/>
+              </a:rPr>
+              <a:t>격투가</a:t>
+            </a:r>
+          </a:p>
+        </p:txBody>
+      </p:sp>
+      <p:sp>
+        <p:nvSpPr>
+          <p:cNvPr id="12" name="TextBox 11">
+            <a:extLst>
+              <a:ext uri="{FF2B5EF4-FFF2-40B4-BE49-F238E27FC236}">
+                <a16:creationId xmlns:a16="http://schemas.microsoft.com/office/drawing/2014/main" id="{A586E0C0-C6B9-F483-D05F-B0FE842BC77C}"/>
+              </a:ext>
+            </a:extLst>
+          </p:cNvPr>
+          <p:cNvSpPr txBox="1"/>
+          <p:nvPr/>
+        </p:nvSpPr>
+        <p:spPr>
+          <a:xfrm>
+            <a:off x="551088" y="981323"/>
+            <a:ext cx="11221811" cy="4251870"/>
+          </a:xfrm>
+          <a:prstGeom prst="rect">
+            <a:avLst/>
+          </a:prstGeom>
+          <a:noFill/>
+        </p:spPr>
+        <p:txBody>
+          <a:bodyPr wrap="square" rtlCol="0">
+            <a:spAutoFit/>
+          </a:bodyPr>
+          <a:lstStyle/>
+          <a:p>
+            <a:pPr>
+              <a:lnSpc>
+                <a:spcPct val="150000"/>
+              </a:lnSpc>
+            </a:pPr>
+            <a:r>
+              <a:rPr lang="ko-KR" altLang="en-US" sz="1400" dirty="0"/>
+              <a:t>빠른 기동성과 공격속도</a:t>
+            </a:r>
+            <a:r>
+              <a:rPr lang="en-US" altLang="ko-KR" sz="1400" dirty="0"/>
+              <a:t> / </a:t>
+            </a:r>
+            <a:r>
+              <a:rPr lang="ko-KR" altLang="en-US" sz="1400" dirty="0"/>
+              <a:t>단일 상대로 강함</a:t>
+            </a:r>
+            <a:endParaRPr lang="en-US" altLang="ko-KR" sz="1400" dirty="0"/>
+          </a:p>
+          <a:p>
+            <a:pPr>
+              <a:lnSpc>
+                <a:spcPct val="150000"/>
+              </a:lnSpc>
+            </a:pPr>
+            <a:endParaRPr lang="en-US" altLang="ko-KR" sz="1400" dirty="0"/>
+          </a:p>
+          <a:p>
+            <a:pPr>
+              <a:lnSpc>
+                <a:spcPct val="150000"/>
+              </a:lnSpc>
+            </a:pPr>
+            <a:r>
+              <a:rPr lang="ko-KR" altLang="en-US" sz="1400" dirty="0"/>
+              <a:t>액션</a:t>
+            </a:r>
+            <a:endParaRPr lang="en-US" altLang="ko-KR" sz="1400" dirty="0"/>
+          </a:p>
+          <a:p>
+            <a:pPr>
+              <a:lnSpc>
+                <a:spcPct val="150000"/>
+              </a:lnSpc>
+            </a:pPr>
+            <a:r>
+              <a:rPr lang="ko-KR" altLang="en-US" sz="1400" dirty="0"/>
+              <a:t>기본공격 </a:t>
+            </a:r>
+            <a:r>
+              <a:rPr lang="en-US" altLang="ko-KR" sz="1400" dirty="0"/>
+              <a:t>- </a:t>
+            </a:r>
+            <a:r>
+              <a:rPr lang="ko-KR" altLang="en-US" sz="1400" dirty="0"/>
+              <a:t>연속 </a:t>
+            </a:r>
+            <a:r>
+              <a:rPr lang="en-US" altLang="ko-KR" sz="1400" dirty="0"/>
+              <a:t>4</a:t>
+            </a:r>
+            <a:r>
+              <a:rPr lang="ko-KR" altLang="en-US" sz="1400" dirty="0"/>
+              <a:t>타 </a:t>
+            </a:r>
+            <a:r>
+              <a:rPr lang="en-US" altLang="ko-KR" sz="1400" dirty="0"/>
+              <a:t>(</a:t>
+            </a:r>
+            <a:r>
+              <a:rPr lang="ko-KR" altLang="en-US" sz="1400" dirty="0"/>
+              <a:t>던파 격투가</a:t>
+            </a:r>
+            <a:r>
+              <a:rPr lang="en-US" altLang="ko-KR" sz="1400" dirty="0"/>
+              <a:t>)</a:t>
+            </a:r>
+          </a:p>
+          <a:p>
+            <a:pPr>
+              <a:lnSpc>
+                <a:spcPct val="150000"/>
+              </a:lnSpc>
+            </a:pPr>
+            <a:r>
+              <a:rPr lang="ko-KR" altLang="en-US" sz="1400" dirty="0" err="1"/>
+              <a:t>대쉬공격</a:t>
+            </a:r>
+            <a:r>
+              <a:rPr lang="ko-KR" altLang="en-US" sz="1400" dirty="0"/>
+              <a:t> </a:t>
+            </a:r>
+            <a:r>
+              <a:rPr lang="en-US" altLang="ko-KR" sz="1400" dirty="0"/>
+              <a:t>– </a:t>
+            </a:r>
+            <a:r>
+              <a:rPr lang="ko-KR" altLang="en-US" sz="1400" dirty="0"/>
+              <a:t>돌려차기</a:t>
+            </a:r>
+            <a:endParaRPr lang="en-US" altLang="ko-KR" sz="1400" dirty="0"/>
+          </a:p>
+          <a:p>
+            <a:pPr>
+              <a:lnSpc>
+                <a:spcPct val="150000"/>
+              </a:lnSpc>
+            </a:pPr>
+            <a:r>
+              <a:rPr lang="ko-KR" altLang="en-US" sz="1400" dirty="0"/>
+              <a:t>특수공격 </a:t>
+            </a:r>
+            <a:r>
+              <a:rPr lang="en-US" altLang="ko-KR" sz="1400" dirty="0"/>
+              <a:t>- </a:t>
+            </a:r>
+            <a:r>
+              <a:rPr lang="ko-KR" altLang="en-US" sz="1400" dirty="0" err="1"/>
+              <a:t>바디블로</a:t>
+            </a:r>
+            <a:endParaRPr lang="en-US" altLang="ko-KR" sz="1400" dirty="0"/>
+          </a:p>
+          <a:p>
+            <a:pPr>
+              <a:lnSpc>
+                <a:spcPct val="150000"/>
+              </a:lnSpc>
+            </a:pPr>
+            <a:r>
+              <a:rPr lang="ko-KR" altLang="en-US" sz="1400" dirty="0"/>
+              <a:t>점프 </a:t>
+            </a:r>
+            <a:r>
+              <a:rPr lang="ko-KR" altLang="en-US" sz="1400" dirty="0" err="1"/>
+              <a:t>왼클릭</a:t>
+            </a:r>
+            <a:r>
+              <a:rPr lang="ko-KR" altLang="en-US" sz="1400" dirty="0"/>
+              <a:t> </a:t>
+            </a:r>
+            <a:r>
+              <a:rPr lang="en-US" altLang="ko-KR" sz="1400" dirty="0"/>
+              <a:t>- </a:t>
+            </a:r>
+            <a:r>
+              <a:rPr lang="ko-KR" altLang="en-US" sz="1400" dirty="0"/>
+              <a:t>발차기</a:t>
+            </a:r>
+            <a:endParaRPr lang="en-US" altLang="ko-KR" sz="1400" dirty="0"/>
+          </a:p>
+          <a:p>
+            <a:pPr>
+              <a:lnSpc>
+                <a:spcPct val="150000"/>
+              </a:lnSpc>
+            </a:pPr>
+            <a:r>
+              <a:rPr lang="ko-KR" altLang="en-US" sz="1400" dirty="0"/>
+              <a:t>점프 </a:t>
+            </a:r>
+            <a:r>
+              <a:rPr lang="ko-KR" altLang="en-US" sz="1400" dirty="0" err="1"/>
+              <a:t>우클릭</a:t>
+            </a:r>
+            <a:r>
+              <a:rPr lang="ko-KR" altLang="en-US" sz="1400" dirty="0"/>
+              <a:t> </a:t>
+            </a:r>
+            <a:r>
+              <a:rPr lang="en-US" altLang="ko-KR" sz="1400" dirty="0"/>
+              <a:t>- </a:t>
+            </a:r>
+            <a:r>
+              <a:rPr lang="ko-KR" altLang="en-US" sz="1400" dirty="0" err="1"/>
+              <a:t>공중밟기</a:t>
+            </a:r>
+            <a:endParaRPr lang="en-US" altLang="ko-KR" sz="1400" dirty="0"/>
+          </a:p>
+          <a:p>
+            <a:pPr>
+              <a:lnSpc>
+                <a:spcPct val="150000"/>
+              </a:lnSpc>
+            </a:pPr>
+            <a:r>
+              <a:rPr lang="ko-KR" altLang="en-US" sz="1400" dirty="0" err="1"/>
+              <a:t>저스트가드</a:t>
+            </a:r>
+            <a:r>
+              <a:rPr lang="ko-KR" altLang="en-US" sz="1400" dirty="0"/>
+              <a:t> </a:t>
+            </a:r>
+            <a:r>
+              <a:rPr lang="en-US" altLang="ko-KR" sz="1400" dirty="0"/>
+              <a:t>- </a:t>
+            </a:r>
+            <a:r>
+              <a:rPr lang="ko-KR" altLang="en-US" sz="1400" dirty="0"/>
+              <a:t>펀치로 날려버리기</a:t>
+            </a:r>
+            <a:endParaRPr lang="en-US" altLang="ko-KR" sz="1400" dirty="0"/>
+          </a:p>
+          <a:p>
+            <a:pPr>
+              <a:lnSpc>
+                <a:spcPct val="150000"/>
+              </a:lnSpc>
+            </a:pPr>
+            <a:r>
+              <a:rPr lang="en-US" altLang="ko-KR" sz="1400" dirty="0"/>
+              <a:t>Q – </a:t>
+            </a:r>
+            <a:r>
+              <a:rPr lang="ko-KR" altLang="en-US" sz="1400" dirty="0"/>
+              <a:t>전진성이 강한 무릎차기 </a:t>
+            </a:r>
+            <a:r>
+              <a:rPr lang="en-US" altLang="ko-KR" sz="1400" dirty="0"/>
+              <a:t>(KOF </a:t>
+            </a:r>
+            <a:r>
+              <a:rPr lang="ko-KR" altLang="en-US" sz="1400" dirty="0"/>
+              <a:t>죠</a:t>
+            </a:r>
+            <a:r>
+              <a:rPr lang="en-US" altLang="ko-KR" sz="1400" dirty="0"/>
+              <a:t>)</a:t>
+            </a:r>
+          </a:p>
+          <a:p>
+            <a:pPr>
+              <a:lnSpc>
+                <a:spcPct val="150000"/>
+              </a:lnSpc>
+            </a:pPr>
+            <a:r>
+              <a:rPr lang="en-US" altLang="ko-KR" sz="1400" dirty="0"/>
+              <a:t>E – DPS</a:t>
+            </a:r>
+            <a:r>
+              <a:rPr lang="ko-KR" altLang="en-US" sz="1400" dirty="0"/>
+              <a:t>가 높은 </a:t>
+            </a:r>
+            <a:r>
+              <a:rPr lang="ko-KR" altLang="en-US" sz="1400" dirty="0" err="1"/>
+              <a:t>싸커킥</a:t>
+            </a:r>
+            <a:endParaRPr lang="en-US" altLang="ko-KR" sz="1400" dirty="0"/>
+          </a:p>
+          <a:p>
+            <a:pPr>
+              <a:lnSpc>
+                <a:spcPct val="150000"/>
+              </a:lnSpc>
+            </a:pPr>
+            <a:r>
+              <a:rPr lang="en-US" altLang="ko-KR" sz="1400" dirty="0"/>
+              <a:t>R - </a:t>
+            </a:r>
+            <a:r>
+              <a:rPr lang="ko-KR" altLang="en-US" sz="1400" dirty="0"/>
+              <a:t>범위 내 무작위 적에게 이동 후 무작위 공격 </a:t>
+            </a:r>
+            <a:r>
+              <a:rPr lang="en-US" altLang="ko-KR" sz="1400" dirty="0"/>
+              <a:t>40</a:t>
+            </a:r>
+            <a:r>
+              <a:rPr lang="ko-KR" altLang="en-US" sz="1400" dirty="0"/>
+              <a:t>회를 반복</a:t>
+            </a:r>
+            <a:endParaRPr lang="en-US" altLang="ko-KR" sz="1400" dirty="0"/>
+          </a:p>
+          <a:p>
+            <a:pPr>
+              <a:lnSpc>
+                <a:spcPct val="150000"/>
+              </a:lnSpc>
+            </a:pPr>
+            <a:endParaRPr lang="en-US" altLang="ko-KR" sz="1400" dirty="0"/>
+          </a:p>
+        </p:txBody>
+      </p:sp>
+    </p:spTree>
+    <p:extLst>
+      <p:ext uri="{BB962C8B-B14F-4D97-AF65-F5344CB8AC3E}">
+        <p14:creationId xmlns:p14="http://schemas.microsoft.com/office/powerpoint/2010/main" val="915892371"/>
+      </p:ext>
+    </p:extLst>
+  </p:cSld>
+  <p:clrMapOvr>
+    <a:masterClrMapping/>
+  </p:clrMapOvr>
+</p:sld>
+</file>
+
+<file path=ppt/slides/slide3.xml><?xml version="1.0" encoding="utf-8"?>
+<p:sld xmlns:a="http://schemas.openxmlformats.org/drawingml/2006/main" xmlns:r="http://schemas.openxmlformats.org/officeDocument/2006/relationships" xmlns:p="http://schemas.openxmlformats.org/presentationml/2006/main">
+  <p:cSld>
+    <p:spTree>
+      <p:nvGrpSpPr>
+        <p:cNvPr id="1" name="">
+          <a:extLst>
+            <a:ext uri="{FF2B5EF4-FFF2-40B4-BE49-F238E27FC236}">
               <a16:creationId xmlns:a16="http://schemas.microsoft.com/office/drawing/2014/main" id="{2CFFD80B-BF46-1152-3732-881A7BE8F997}"/>
             </a:ext>
           </a:extLst>
@@ -4205,7 +4625,7 @@
 </p:sld>
 </file>
 
-<file path=ppt/slides/slide3.xml><?xml version="1.0" encoding="utf-8"?>
+<file path=ppt/slides/slide4.xml><?xml version="1.0" encoding="utf-8"?>
 <p:sld xmlns:a="http://schemas.openxmlformats.org/drawingml/2006/main" xmlns:r="http://schemas.openxmlformats.org/officeDocument/2006/relationships" xmlns:p="http://schemas.openxmlformats.org/presentationml/2006/main">
   <p:cSld>
     <p:spTree>
@@ -4498,7 +4918,7 @@
 </p:sld>
 </file>
 
-<file path=ppt/slides/slide4.xml><?xml version="1.0" encoding="utf-8"?>
+<file path=ppt/slides/slide5.xml><?xml version="1.0" encoding="utf-8"?>
 <p:sld xmlns:a="http://schemas.openxmlformats.org/drawingml/2006/main" xmlns:r="http://schemas.openxmlformats.org/officeDocument/2006/relationships" xmlns:p="http://schemas.openxmlformats.org/presentationml/2006/main">
   <p:cSld>
     <p:spTree>

--- a/Document/챕터0.pptx
+++ b/Document/챕터0.pptx
@@ -263,7 +263,7 @@
           <a:p>
             <a:fld id="{648F4243-01F6-402A-BD5A-4BF3AAF5FC46}" type="datetimeFigureOut">
               <a:rPr lang="ko-KR" altLang="en-US" smtClean="0"/>
-              <a:t>2026-02-04</a:t>
+              <a:t>2026-02-06</a:t>
             </a:fld>
             <a:endParaRPr lang="ko-KR" altLang="en-US"/>
           </a:p>
@@ -461,7 +461,7 @@
           <a:p>
             <a:fld id="{648F4243-01F6-402A-BD5A-4BF3AAF5FC46}" type="datetimeFigureOut">
               <a:rPr lang="ko-KR" altLang="en-US" smtClean="0"/>
-              <a:t>2026-02-04</a:t>
+              <a:t>2026-02-06</a:t>
             </a:fld>
             <a:endParaRPr lang="ko-KR" altLang="en-US"/>
           </a:p>
@@ -669,7 +669,7 @@
           <a:p>
             <a:fld id="{648F4243-01F6-402A-BD5A-4BF3AAF5FC46}" type="datetimeFigureOut">
               <a:rPr lang="ko-KR" altLang="en-US" smtClean="0"/>
-              <a:t>2026-02-04</a:t>
+              <a:t>2026-02-06</a:t>
             </a:fld>
             <a:endParaRPr lang="ko-KR" altLang="en-US"/>
           </a:p>
@@ -867,7 +867,7 @@
           <a:p>
             <a:fld id="{648F4243-01F6-402A-BD5A-4BF3AAF5FC46}" type="datetimeFigureOut">
               <a:rPr lang="ko-KR" altLang="en-US" smtClean="0"/>
-              <a:t>2026-02-04</a:t>
+              <a:t>2026-02-06</a:t>
             </a:fld>
             <a:endParaRPr lang="ko-KR" altLang="en-US"/>
           </a:p>
@@ -1142,7 +1142,7 @@
           <a:p>
             <a:fld id="{648F4243-01F6-402A-BD5A-4BF3AAF5FC46}" type="datetimeFigureOut">
               <a:rPr lang="ko-KR" altLang="en-US" smtClean="0"/>
-              <a:t>2026-02-04</a:t>
+              <a:t>2026-02-06</a:t>
             </a:fld>
             <a:endParaRPr lang="ko-KR" altLang="en-US"/>
           </a:p>
@@ -1407,7 +1407,7 @@
           <a:p>
             <a:fld id="{648F4243-01F6-402A-BD5A-4BF3AAF5FC46}" type="datetimeFigureOut">
               <a:rPr lang="ko-KR" altLang="en-US" smtClean="0"/>
-              <a:t>2026-02-04</a:t>
+              <a:t>2026-02-06</a:t>
             </a:fld>
             <a:endParaRPr lang="ko-KR" altLang="en-US"/>
           </a:p>
@@ -1819,7 +1819,7 @@
           <a:p>
             <a:fld id="{648F4243-01F6-402A-BD5A-4BF3AAF5FC46}" type="datetimeFigureOut">
               <a:rPr lang="ko-KR" altLang="en-US" smtClean="0"/>
-              <a:t>2026-02-04</a:t>
+              <a:t>2026-02-06</a:t>
             </a:fld>
             <a:endParaRPr lang="ko-KR" altLang="en-US"/>
           </a:p>
@@ -1960,7 +1960,7 @@
           <a:p>
             <a:fld id="{648F4243-01F6-402A-BD5A-4BF3AAF5FC46}" type="datetimeFigureOut">
               <a:rPr lang="ko-KR" altLang="en-US" smtClean="0"/>
-              <a:t>2026-02-04</a:t>
+              <a:t>2026-02-06</a:t>
             </a:fld>
             <a:endParaRPr lang="ko-KR" altLang="en-US"/>
           </a:p>
@@ -2073,7 +2073,7 @@
           <a:p>
             <a:fld id="{648F4243-01F6-402A-BD5A-4BF3AAF5FC46}" type="datetimeFigureOut">
               <a:rPr lang="ko-KR" altLang="en-US" smtClean="0"/>
-              <a:t>2026-02-04</a:t>
+              <a:t>2026-02-06</a:t>
             </a:fld>
             <a:endParaRPr lang="ko-KR" altLang="en-US"/>
           </a:p>
@@ -2384,7 +2384,7 @@
           <a:p>
             <a:fld id="{648F4243-01F6-402A-BD5A-4BF3AAF5FC46}" type="datetimeFigureOut">
               <a:rPr lang="ko-KR" altLang="en-US" smtClean="0"/>
-              <a:t>2026-02-04</a:t>
+              <a:t>2026-02-06</a:t>
             </a:fld>
             <a:endParaRPr lang="ko-KR" altLang="en-US"/>
           </a:p>
@@ -2672,7 +2672,7 @@
           <a:p>
             <a:fld id="{648F4243-01F6-402A-BD5A-4BF3AAF5FC46}" type="datetimeFigureOut">
               <a:rPr lang="ko-KR" altLang="en-US" smtClean="0"/>
-              <a:t>2026-02-04</a:t>
+              <a:t>2026-02-06</a:t>
             </a:fld>
             <a:endParaRPr lang="ko-KR" altLang="en-US"/>
           </a:p>
@@ -2913,7 +2913,7 @@
           <a:p>
             <a:fld id="{648F4243-01F6-402A-BD5A-4BF3AAF5FC46}" type="datetimeFigureOut">
               <a:rPr lang="ko-KR" altLang="en-US" smtClean="0"/>
-              <a:t>2026-02-04</a:t>
+              <a:t>2026-02-06</a:t>
             </a:fld>
             <a:endParaRPr lang="ko-KR" altLang="en-US"/>
           </a:p>
@@ -4018,13 +4018,28 @@
             </a:r>
             <a:r>
               <a:rPr lang="en-US" altLang="ko-KR" sz="1400" dirty="0"/>
-              <a:t>- </a:t>
+              <a:t>– </a:t>
             </a:r>
             <a:r>
               <a:rPr lang="ko-KR" altLang="en-US" sz="1400" dirty="0" err="1"/>
               <a:t>바디블로</a:t>
             </a:r>
-            <a:endParaRPr lang="en-US" altLang="ko-KR" sz="1400" dirty="0"/>
+            <a:r>
+              <a:rPr lang="ko-KR" altLang="en-US" sz="1400" dirty="0"/>
+              <a:t> </a:t>
+            </a:r>
+            <a:r>
+              <a:rPr lang="en-US" altLang="ko-KR" sz="1400" dirty="0"/>
+              <a:t>(</a:t>
+            </a:r>
+            <a:r>
+              <a:rPr lang="ko-KR" altLang="en-US" sz="1400" dirty="0"/>
+              <a:t>바닥에서 밀려남</a:t>
+            </a:r>
+            <a:r>
+              <a:rPr lang="en-US" altLang="ko-KR" sz="1400" dirty="0"/>
+              <a:t>)</a:t>
+            </a:r>
           </a:p>
           <a:p>
             <a:pPr>
@@ -4037,16 +4052,16 @@
               <a:t>점프 </a:t>
             </a:r>
             <a:r>
-              <a:rPr lang="ko-KR" altLang="en-US" sz="1400" dirty="0" err="1"/>
+              <a:rPr lang="ko-KR" altLang="en-US" sz="1400" err="1"/>
               <a:t>왼클릭</a:t>
             </a:r>
             <a:r>
-              <a:rPr lang="ko-KR" altLang="en-US" sz="1400" dirty="0"/>
+              <a:rPr lang="ko-KR" altLang="en-US" sz="1400"/>
               <a:t> </a:t>
             </a:r>
             <a:r>
-              <a:rPr lang="en-US" altLang="ko-KR" sz="1400" dirty="0"/>
-              <a:t>- </a:t>
+              <a:rPr lang="en-US" altLang="ko-KR" sz="1400"/>
+              <a:t>– </a:t>
             </a:r>
             <a:r>
               <a:rPr lang="ko-KR" altLang="en-US" sz="1400" dirty="0"/>
@@ -4074,13 +4089,28 @@
             </a:r>
             <a:r>
               <a:rPr lang="en-US" altLang="ko-KR" sz="1400" dirty="0"/>
-              <a:t>- </a:t>
+              <a:t>– </a:t>
             </a:r>
             <a:r>
               <a:rPr lang="ko-KR" altLang="en-US" sz="1400" dirty="0" err="1"/>
               <a:t>공중밟기</a:t>
             </a:r>
-            <a:endParaRPr lang="en-US" altLang="ko-KR" sz="1400" dirty="0"/>
+            <a:r>
+              <a:rPr lang="ko-KR" altLang="en-US" sz="1400" dirty="0"/>
+              <a:t> </a:t>
+            </a:r>
+            <a:r>
+              <a:rPr lang="en-US" altLang="ko-KR" sz="1400" dirty="0"/>
+              <a:t>(</a:t>
+            </a:r>
+            <a:r>
+              <a:rPr lang="ko-KR" altLang="en-US" sz="1400" dirty="0"/>
+              <a:t>적을 밟고 점프</a:t>
+            </a:r>
+            <a:r>
+              <a:rPr lang="en-US" altLang="ko-KR" sz="1400" dirty="0"/>
+              <a:t>)</a:t>
+            </a:r>
           </a:p>
           <a:p>
             <a:pPr>
@@ -4089,16 +4119,16 @@
               </a:lnSpc>
             </a:pPr>
             <a:r>
-              <a:rPr lang="ko-KR" altLang="en-US" sz="1400" dirty="0" err="1"/>
+              <a:rPr lang="ko-KR" altLang="en-US" sz="1400" err="1"/>
               <a:t>저스트가드</a:t>
             </a:r>
             <a:r>
-              <a:rPr lang="ko-KR" altLang="en-US" sz="1400" dirty="0"/>
+              <a:rPr lang="ko-KR" altLang="en-US" sz="1400"/>
               <a:t> </a:t>
             </a:r>
             <a:r>
-              <a:rPr lang="en-US" altLang="ko-KR" sz="1400" dirty="0"/>
-              <a:t>- </a:t>
+              <a:rPr lang="en-US" altLang="ko-KR" sz="1400"/>
+              <a:t>– </a:t>
             </a:r>
             <a:r>
               <a:rPr lang="ko-KR" altLang="en-US" sz="1400" dirty="0"/>

--- a/Document/챕터0.pptx
+++ b/Document/챕터0.pptx
@@ -9,7 +9,6 @@
     <p:sldId id="281" r:id="rId3"/>
     <p:sldId id="279" r:id="rId4"/>
     <p:sldId id="278" r:id="rId5"/>
-    <p:sldId id="280" r:id="rId6"/>
   </p:sldIdLst>
   <p:sldSz cx="12192000" cy="6858000"/>
   <p:notesSz cx="6858000" cy="9144000"/>
@@ -263,7 +262,7 @@
           <a:p>
             <a:fld id="{648F4243-01F6-402A-BD5A-4BF3AAF5FC46}" type="datetimeFigureOut">
               <a:rPr lang="ko-KR" altLang="en-US" smtClean="0"/>
-              <a:t>2026-02-06</a:t>
+              <a:t>2026-02-07</a:t>
             </a:fld>
             <a:endParaRPr lang="ko-KR" altLang="en-US"/>
           </a:p>
@@ -461,7 +460,7 @@
           <a:p>
             <a:fld id="{648F4243-01F6-402A-BD5A-4BF3AAF5FC46}" type="datetimeFigureOut">
               <a:rPr lang="ko-KR" altLang="en-US" smtClean="0"/>
-              <a:t>2026-02-06</a:t>
+              <a:t>2026-02-07</a:t>
             </a:fld>
             <a:endParaRPr lang="ko-KR" altLang="en-US"/>
           </a:p>
@@ -669,7 +668,7 @@
           <a:p>
             <a:fld id="{648F4243-01F6-402A-BD5A-4BF3AAF5FC46}" type="datetimeFigureOut">
               <a:rPr lang="ko-KR" altLang="en-US" smtClean="0"/>
-              <a:t>2026-02-06</a:t>
+              <a:t>2026-02-07</a:t>
             </a:fld>
             <a:endParaRPr lang="ko-KR" altLang="en-US"/>
           </a:p>
@@ -867,7 +866,7 @@
           <a:p>
             <a:fld id="{648F4243-01F6-402A-BD5A-4BF3AAF5FC46}" type="datetimeFigureOut">
               <a:rPr lang="ko-KR" altLang="en-US" smtClean="0"/>
-              <a:t>2026-02-06</a:t>
+              <a:t>2026-02-07</a:t>
             </a:fld>
             <a:endParaRPr lang="ko-KR" altLang="en-US"/>
           </a:p>
@@ -1142,7 +1141,7 @@
           <a:p>
             <a:fld id="{648F4243-01F6-402A-BD5A-4BF3AAF5FC46}" type="datetimeFigureOut">
               <a:rPr lang="ko-KR" altLang="en-US" smtClean="0"/>
-              <a:t>2026-02-06</a:t>
+              <a:t>2026-02-07</a:t>
             </a:fld>
             <a:endParaRPr lang="ko-KR" altLang="en-US"/>
           </a:p>
@@ -1407,7 +1406,7 @@
           <a:p>
             <a:fld id="{648F4243-01F6-402A-BD5A-4BF3AAF5FC46}" type="datetimeFigureOut">
               <a:rPr lang="ko-KR" altLang="en-US" smtClean="0"/>
-              <a:t>2026-02-06</a:t>
+              <a:t>2026-02-07</a:t>
             </a:fld>
             <a:endParaRPr lang="ko-KR" altLang="en-US"/>
           </a:p>
@@ -1819,7 +1818,7 @@
           <a:p>
             <a:fld id="{648F4243-01F6-402A-BD5A-4BF3AAF5FC46}" type="datetimeFigureOut">
               <a:rPr lang="ko-KR" altLang="en-US" smtClean="0"/>
-              <a:t>2026-02-06</a:t>
+              <a:t>2026-02-07</a:t>
             </a:fld>
             <a:endParaRPr lang="ko-KR" altLang="en-US"/>
           </a:p>
@@ -1960,7 +1959,7 @@
           <a:p>
             <a:fld id="{648F4243-01F6-402A-BD5A-4BF3AAF5FC46}" type="datetimeFigureOut">
               <a:rPr lang="ko-KR" altLang="en-US" smtClean="0"/>
-              <a:t>2026-02-06</a:t>
+              <a:t>2026-02-07</a:t>
             </a:fld>
             <a:endParaRPr lang="ko-KR" altLang="en-US"/>
           </a:p>
@@ -2073,7 +2072,7 @@
           <a:p>
             <a:fld id="{648F4243-01F6-402A-BD5A-4BF3AAF5FC46}" type="datetimeFigureOut">
               <a:rPr lang="ko-KR" altLang="en-US" smtClean="0"/>
-              <a:t>2026-02-06</a:t>
+              <a:t>2026-02-07</a:t>
             </a:fld>
             <a:endParaRPr lang="ko-KR" altLang="en-US"/>
           </a:p>
@@ -2384,7 +2383,7 @@
           <a:p>
             <a:fld id="{648F4243-01F6-402A-BD5A-4BF3AAF5FC46}" type="datetimeFigureOut">
               <a:rPr lang="ko-KR" altLang="en-US" smtClean="0"/>
-              <a:t>2026-02-06</a:t>
+              <a:t>2026-02-07</a:t>
             </a:fld>
             <a:endParaRPr lang="ko-KR" altLang="en-US"/>
           </a:p>
@@ -2672,7 +2671,7 @@
           <a:p>
             <a:fld id="{648F4243-01F6-402A-BD5A-4BF3AAF5FC46}" type="datetimeFigureOut">
               <a:rPr lang="ko-KR" altLang="en-US" smtClean="0"/>
-              <a:t>2026-02-06</a:t>
+              <a:t>2026-02-07</a:t>
             </a:fld>
             <a:endParaRPr lang="ko-KR" altLang="en-US"/>
           </a:p>
@@ -2913,7 +2912,7 @@
           <a:p>
             <a:fld id="{648F4243-01F6-402A-BD5A-4BF3AAF5FC46}" type="datetimeFigureOut">
               <a:rPr lang="ko-KR" altLang="en-US" smtClean="0"/>
-              <a:t>2026-02-06</a:t>
+              <a:t>2026-02-07</a:t>
             </a:fld>
             <a:endParaRPr lang="ko-KR" altLang="en-US"/>
           </a:p>
@@ -4052,15 +4051,15 @@
               <a:t>점프 </a:t>
             </a:r>
             <a:r>
-              <a:rPr lang="ko-KR" altLang="en-US" sz="1400" err="1"/>
+              <a:rPr lang="ko-KR" altLang="en-US" sz="1400" dirty="0" err="1"/>
               <a:t>왼클릭</a:t>
             </a:r>
             <a:r>
-              <a:rPr lang="ko-KR" altLang="en-US" sz="1400"/>
+              <a:rPr lang="ko-KR" altLang="en-US" sz="1400" dirty="0"/>
               <a:t> </a:t>
             </a:r>
             <a:r>
-              <a:rPr lang="en-US" altLang="ko-KR" sz="1400"/>
+              <a:rPr lang="en-US" altLang="ko-KR" sz="1400" dirty="0"/>
               <a:t>– </a:t>
             </a:r>
             <a:r>
@@ -4119,15 +4118,15 @@
               </a:lnSpc>
             </a:pPr>
             <a:r>
-              <a:rPr lang="ko-KR" altLang="en-US" sz="1400" err="1"/>
+              <a:rPr lang="ko-KR" altLang="en-US" sz="1400" dirty="0" err="1"/>
               <a:t>저스트가드</a:t>
             </a:r>
             <a:r>
-              <a:rPr lang="ko-KR" altLang="en-US" sz="1400"/>
+              <a:rPr lang="ko-KR" altLang="en-US" sz="1400" dirty="0"/>
               <a:t> </a:t>
             </a:r>
             <a:r>
-              <a:rPr lang="en-US" altLang="ko-KR" sz="1400"/>
+              <a:rPr lang="en-US" altLang="ko-KR" sz="1400" dirty="0"/>
               <a:t>– </a:t>
             </a:r>
             <a:r>
@@ -4171,15 +4170,19 @@
             </a:pPr>
             <a:r>
               <a:rPr lang="en-US" altLang="ko-KR" sz="1400" dirty="0"/>
-              <a:t>E – DPS</a:t>
-            </a:r>
-            <a:r>
-              <a:rPr lang="ko-KR" altLang="en-US" sz="1400" dirty="0"/>
-              <a:t>가 높은 </a:t>
-            </a:r>
-            <a:r>
-              <a:rPr lang="ko-KR" altLang="en-US" sz="1400" dirty="0" err="1"/>
-              <a:t>싸커킥</a:t>
+              <a:t>E – </a:t>
+            </a:r>
+            <a:r>
+              <a:rPr lang="ko-KR" altLang="en-US" sz="1400" dirty="0"/>
+              <a:t>발로 </a:t>
+            </a:r>
+            <a:r>
+              <a:rPr lang="en-US" altLang="ko-KR" sz="1400" dirty="0"/>
+              <a:t>3</a:t>
+            </a:r>
+            <a:r>
+              <a:rPr lang="ko-KR" altLang="en-US" sz="1400"/>
+              <a:t>연타</a:t>
             </a:r>
             <a:endParaRPr lang="en-US" altLang="ko-KR" sz="1400" dirty="0"/>
           </a:p>
@@ -4939,42 +4942,6 @@
     <p:extLst>
       <p:ext uri="{BB962C8B-B14F-4D97-AF65-F5344CB8AC3E}">
         <p14:creationId xmlns:p14="http://schemas.microsoft.com/office/powerpoint/2010/main" val="2753642043"/>
-      </p:ext>
-    </p:extLst>
-  </p:cSld>
-  <p:clrMapOvr>
-    <a:masterClrMapping/>
-  </p:clrMapOvr>
-</p:sld>
-</file>
-
-<file path=ppt/slides/slide5.xml><?xml version="1.0" encoding="utf-8"?>
-<p:sld xmlns:a="http://schemas.openxmlformats.org/drawingml/2006/main" xmlns:r="http://schemas.openxmlformats.org/officeDocument/2006/relationships" xmlns:p="http://schemas.openxmlformats.org/presentationml/2006/main">
-  <p:cSld>
-    <p:spTree>
-      <p:nvGrpSpPr>
-        <p:cNvPr id="1" name="">
-          <a:extLst>
-            <a:ext uri="{FF2B5EF4-FFF2-40B4-BE49-F238E27FC236}">
-              <a16:creationId xmlns:a16="http://schemas.microsoft.com/office/drawing/2014/main" id="{AEF709AF-1599-394C-203B-A740ACA129AE}"/>
-            </a:ext>
-          </a:extLst>
-        </p:cNvPr>
-        <p:cNvGrpSpPr/>
-        <p:nvPr/>
-      </p:nvGrpSpPr>
-      <p:grpSpPr>
-        <a:xfrm>
-          <a:off x="0" y="0"/>
-          <a:ext cx="0" cy="0"/>
-          <a:chOff x="0" y="0"/>
-          <a:chExt cx="0" cy="0"/>
-        </a:xfrm>
-      </p:grpSpPr>
-    </p:spTree>
-    <p:extLst>
-      <p:ext uri="{BB962C8B-B14F-4D97-AF65-F5344CB8AC3E}">
-        <p14:creationId xmlns:p14="http://schemas.microsoft.com/office/powerpoint/2010/main" val="3717337057"/>
       </p:ext>
     </p:extLst>
   </p:cSld>

--- a/Document/챕터0.pptx
+++ b/Document/챕터0.pptx
@@ -5,10 +5,10 @@
     <p:sldMasterId id="2147483648" r:id="rId1"/>
   </p:sldMasterIdLst>
   <p:sldIdLst>
-    <p:sldId id="277" r:id="rId2"/>
-    <p:sldId id="281" r:id="rId3"/>
-    <p:sldId id="279" r:id="rId4"/>
-    <p:sldId id="278" r:id="rId5"/>
+    <p:sldId id="281" r:id="rId2"/>
+    <p:sldId id="279" r:id="rId3"/>
+    <p:sldId id="278" r:id="rId4"/>
+    <p:sldId id="277" r:id="rId5"/>
   </p:sldIdLst>
   <p:sldSz cx="12192000" cy="6858000"/>
   <p:notesSz cx="6858000" cy="9144000"/>
@@ -262,7 +262,7 @@
           <a:p>
             <a:fld id="{648F4243-01F6-402A-BD5A-4BF3AAF5FC46}" type="datetimeFigureOut">
               <a:rPr lang="ko-KR" altLang="en-US" smtClean="0"/>
-              <a:t>2026-02-07</a:t>
+              <a:t>2026-05-03</a:t>
             </a:fld>
             <a:endParaRPr lang="ko-KR" altLang="en-US"/>
           </a:p>
@@ -460,7 +460,7 @@
           <a:p>
             <a:fld id="{648F4243-01F6-402A-BD5A-4BF3AAF5FC46}" type="datetimeFigureOut">
               <a:rPr lang="ko-KR" altLang="en-US" smtClean="0"/>
-              <a:t>2026-02-07</a:t>
+              <a:t>2026-05-03</a:t>
             </a:fld>
             <a:endParaRPr lang="ko-KR" altLang="en-US"/>
           </a:p>
@@ -668,7 +668,7 @@
           <a:p>
             <a:fld id="{648F4243-01F6-402A-BD5A-4BF3AAF5FC46}" type="datetimeFigureOut">
               <a:rPr lang="ko-KR" altLang="en-US" smtClean="0"/>
-              <a:t>2026-02-07</a:t>
+              <a:t>2026-05-03</a:t>
             </a:fld>
             <a:endParaRPr lang="ko-KR" altLang="en-US"/>
           </a:p>
@@ -866,7 +866,7 @@
           <a:p>
             <a:fld id="{648F4243-01F6-402A-BD5A-4BF3AAF5FC46}" type="datetimeFigureOut">
               <a:rPr lang="ko-KR" altLang="en-US" smtClean="0"/>
-              <a:t>2026-02-07</a:t>
+              <a:t>2026-05-03</a:t>
             </a:fld>
             <a:endParaRPr lang="ko-KR" altLang="en-US"/>
           </a:p>
@@ -1141,7 +1141,7 @@
           <a:p>
             <a:fld id="{648F4243-01F6-402A-BD5A-4BF3AAF5FC46}" type="datetimeFigureOut">
               <a:rPr lang="ko-KR" altLang="en-US" smtClean="0"/>
-              <a:t>2026-02-07</a:t>
+              <a:t>2026-05-03</a:t>
             </a:fld>
             <a:endParaRPr lang="ko-KR" altLang="en-US"/>
           </a:p>
@@ -1406,7 +1406,7 @@
           <a:p>
             <a:fld id="{648F4243-01F6-402A-BD5A-4BF3AAF5FC46}" type="datetimeFigureOut">
               <a:rPr lang="ko-KR" altLang="en-US" smtClean="0"/>
-              <a:t>2026-02-07</a:t>
+              <a:t>2026-05-03</a:t>
             </a:fld>
             <a:endParaRPr lang="ko-KR" altLang="en-US"/>
           </a:p>
@@ -1818,7 +1818,7 @@
           <a:p>
             <a:fld id="{648F4243-01F6-402A-BD5A-4BF3AAF5FC46}" type="datetimeFigureOut">
               <a:rPr lang="ko-KR" altLang="en-US" smtClean="0"/>
-              <a:t>2026-02-07</a:t>
+              <a:t>2026-05-03</a:t>
             </a:fld>
             <a:endParaRPr lang="ko-KR" altLang="en-US"/>
           </a:p>
@@ -1959,7 +1959,7 @@
           <a:p>
             <a:fld id="{648F4243-01F6-402A-BD5A-4BF3AAF5FC46}" type="datetimeFigureOut">
               <a:rPr lang="ko-KR" altLang="en-US" smtClean="0"/>
-              <a:t>2026-02-07</a:t>
+              <a:t>2026-05-03</a:t>
             </a:fld>
             <a:endParaRPr lang="ko-KR" altLang="en-US"/>
           </a:p>
@@ -2072,7 +2072,7 @@
           <a:p>
             <a:fld id="{648F4243-01F6-402A-BD5A-4BF3AAF5FC46}" type="datetimeFigureOut">
               <a:rPr lang="ko-KR" altLang="en-US" smtClean="0"/>
-              <a:t>2026-02-07</a:t>
+              <a:t>2026-05-03</a:t>
             </a:fld>
             <a:endParaRPr lang="ko-KR" altLang="en-US"/>
           </a:p>
@@ -2383,7 +2383,7 @@
           <a:p>
             <a:fld id="{648F4243-01F6-402A-BD5A-4BF3AAF5FC46}" type="datetimeFigureOut">
               <a:rPr lang="ko-KR" altLang="en-US" smtClean="0"/>
-              <a:t>2026-02-07</a:t>
+              <a:t>2026-05-03</a:t>
             </a:fld>
             <a:endParaRPr lang="ko-KR" altLang="en-US"/>
           </a:p>
@@ -2671,7 +2671,7 @@
           <a:p>
             <a:fld id="{648F4243-01F6-402A-BD5A-4BF3AAF5FC46}" type="datetimeFigureOut">
               <a:rPr lang="ko-KR" altLang="en-US" smtClean="0"/>
-              <a:t>2026-02-07</a:t>
+              <a:t>2026-05-03</a:t>
             </a:fld>
             <a:endParaRPr lang="ko-KR" altLang="en-US"/>
           </a:p>
@@ -2912,7 +2912,7 @@
           <a:p>
             <a:fld id="{648F4243-01F6-402A-BD5A-4BF3AAF5FC46}" type="datetimeFigureOut">
               <a:rPr lang="ko-KR" altLang="en-US" smtClean="0"/>
-              <a:t>2026-02-07</a:t>
+              <a:t>2026-05-03</a:t>
             </a:fld>
             <a:endParaRPr lang="ko-KR" altLang="en-US"/>
           </a:p>
@@ -3422,7 +3422,7 @@
         <p:spPr>
           <a:xfrm>
             <a:off x="551088" y="981323"/>
-            <a:ext cx="11221811" cy="4898200"/>
+            <a:ext cx="11221811" cy="4251870"/>
           </a:xfrm>
           <a:prstGeom prst="rect">
             <a:avLst/>
@@ -3481,12 +3481,8 @@
               </a:lnSpc>
             </a:pPr>
             <a:r>
-              <a:rPr lang="ko-KR" altLang="en-US" sz="1400" dirty="0" err="1"/>
-              <a:t>왼클릭</a:t>
-            </a:r>
-            <a:r>
-              <a:rPr lang="ko-KR" altLang="en-US" sz="1400" dirty="0"/>
-              <a:t> </a:t>
+              <a:rPr lang="ko-KR" altLang="en-US" sz="1400" dirty="0"/>
+              <a:t>기본공격 </a:t>
             </a:r>
             <a:r>
               <a:rPr lang="en-US" altLang="ko-KR" sz="1400" dirty="0"/>
@@ -3525,7 +3521,7 @@
             </a:pPr>
             <a:r>
               <a:rPr lang="ko-KR" altLang="en-US" sz="1400" dirty="0" err="1"/>
-              <a:t>전방대쉬</a:t>
+              <a:t>대쉬공격</a:t>
             </a:r>
             <a:r>
               <a:rPr lang="ko-KR" altLang="en-US" sz="1400" dirty="0"/>
@@ -3533,11 +3529,11 @@
             </a:r>
             <a:r>
               <a:rPr lang="en-US" altLang="ko-KR" sz="1400" dirty="0"/>
-              <a:t>- </a:t>
-            </a:r>
-            <a:r>
-              <a:rPr lang="ko-KR" altLang="en-US" sz="1400" dirty="0" err="1"/>
-              <a:t>붕권</a:t>
+              <a:t>– </a:t>
+            </a:r>
+            <a:r>
+              <a:rPr lang="ko-KR" altLang="en-US" sz="1400" dirty="0"/>
+              <a:t>돌려차기</a:t>
             </a:r>
             <a:endParaRPr lang="en-US" altLang="ko-KR" sz="1400" dirty="0"/>
           </a:p>
@@ -3548,8 +3544,16 @@
               </a:lnSpc>
             </a:pPr>
             <a:r>
+              <a:rPr lang="ko-KR" altLang="en-US" sz="1400" dirty="0"/>
+              <a:t>특수공격 </a:t>
+            </a:r>
+            <a:r>
+              <a:rPr lang="en-US" altLang="ko-KR" sz="1400" dirty="0"/>
+              <a:t>– </a:t>
+            </a:r>
+            <a:r>
               <a:rPr lang="ko-KR" altLang="en-US" sz="1400" dirty="0" err="1"/>
-              <a:t>사이드대쉬</a:t>
+              <a:t>바디블로</a:t>
             </a:r>
             <a:r>
               <a:rPr lang="ko-KR" altLang="en-US" sz="1400" dirty="0"/>
@@ -3557,13 +3561,16 @@
             </a:r>
             <a:r>
               <a:rPr lang="en-US" altLang="ko-KR" sz="1400" dirty="0"/>
-              <a:t>- </a:t>
-            </a:r>
-            <a:r>
-              <a:rPr lang="ko-KR" altLang="en-US" sz="1400" dirty="0"/>
-              <a:t>돌려차기</a:t>
-            </a:r>
-            <a:endParaRPr lang="en-US" altLang="ko-KR" sz="1400" dirty="0"/>
+              <a:t>(</a:t>
+            </a:r>
+            <a:r>
+              <a:rPr lang="ko-KR" altLang="en-US" sz="1400" dirty="0"/>
+              <a:t>바닥에서 밀려남</a:t>
+            </a:r>
+            <a:r>
+              <a:rPr lang="en-US" altLang="ko-KR" sz="1400" dirty="0"/>
+              <a:t>)</a:t>
+            </a:r>
           </a:p>
           <a:p>
             <a:pPr>
@@ -3572,8 +3579,12 @@
               </a:lnSpc>
             </a:pPr>
             <a:r>
+              <a:rPr lang="ko-KR" altLang="en-US" sz="1400" dirty="0"/>
+              <a:t>점프 </a:t>
+            </a:r>
+            <a:r>
               <a:rPr lang="ko-KR" altLang="en-US" sz="1400" dirty="0" err="1"/>
-              <a:t>후방대쉬</a:t>
+              <a:t>왼클릭</a:t>
             </a:r>
             <a:r>
               <a:rPr lang="ko-KR" altLang="en-US" sz="1400" dirty="0"/>
@@ -3581,11 +3592,11 @@
             </a:r>
             <a:r>
               <a:rPr lang="en-US" altLang="ko-KR" sz="1400" dirty="0"/>
-              <a:t>- </a:t>
-            </a:r>
-            <a:r>
-              <a:rPr lang="ko-KR" altLang="en-US" sz="1400" dirty="0"/>
-              <a:t>지면 내려찍기</a:t>
+              <a:t>– </a:t>
+            </a:r>
+            <a:r>
+              <a:rPr lang="ko-KR" altLang="en-US" sz="1400" dirty="0"/>
+              <a:t>발차기</a:t>
             </a:r>
             <a:endParaRPr lang="en-US" altLang="ko-KR" sz="1400" dirty="0"/>
           </a:p>
@@ -3596,6 +3607,10 @@
               </a:lnSpc>
             </a:pPr>
             <a:r>
+              <a:rPr lang="ko-KR" altLang="en-US" sz="1400" dirty="0"/>
+              <a:t>점프 </a:t>
+            </a:r>
+            <a:r>
               <a:rPr lang="ko-KR" altLang="en-US" sz="1400" dirty="0" err="1"/>
               <a:t>우클릭</a:t>
             </a:r>
@@ -3605,13 +3620,28 @@
             </a:r>
             <a:r>
               <a:rPr lang="en-US" altLang="ko-KR" sz="1400" dirty="0"/>
-              <a:t>- </a:t>
+              <a:t>– </a:t>
             </a:r>
             <a:r>
               <a:rPr lang="ko-KR" altLang="en-US" sz="1400" dirty="0" err="1"/>
-              <a:t>날려차기</a:t>
-            </a:r>
-            <a:endParaRPr lang="en-US" altLang="ko-KR" sz="1400" dirty="0"/>
+              <a:t>공중밟기</a:t>
+            </a:r>
+            <a:r>
+              <a:rPr lang="ko-KR" altLang="en-US" sz="1400" dirty="0"/>
+              <a:t> </a:t>
+            </a:r>
+            <a:r>
+              <a:rPr lang="en-US" altLang="ko-KR" sz="1400" dirty="0"/>
+              <a:t>(</a:t>
+            </a:r>
+            <a:r>
+              <a:rPr lang="ko-KR" altLang="en-US" sz="1400" dirty="0"/>
+              <a:t>적을 밟고 점프</a:t>
+            </a:r>
+            <a:r>
+              <a:rPr lang="en-US" altLang="ko-KR" sz="1400" dirty="0"/>
+              <a:t>)</a:t>
+            </a:r>
           </a:p>
           <a:p>
             <a:pPr>
@@ -3620,12 +3650,8 @@
               </a:lnSpc>
             </a:pPr>
             <a:r>
-              <a:rPr lang="ko-KR" altLang="en-US" sz="1400" dirty="0"/>
-              <a:t>점프 </a:t>
-            </a:r>
-            <a:r>
               <a:rPr lang="ko-KR" altLang="en-US" sz="1400" dirty="0" err="1"/>
-              <a:t>왼클릭</a:t>
+              <a:t>저스트가드</a:t>
             </a:r>
             <a:r>
               <a:rPr lang="ko-KR" altLang="en-US" sz="1400" dirty="0"/>
@@ -3633,11 +3659,11 @@
             </a:r>
             <a:r>
               <a:rPr lang="en-US" altLang="ko-KR" sz="1400" dirty="0"/>
-              <a:t>- </a:t>
-            </a:r>
-            <a:r>
-              <a:rPr lang="ko-KR" altLang="en-US" sz="1400" dirty="0"/>
-              <a:t>발차기</a:t>
+              <a:t>– </a:t>
+            </a:r>
+            <a:r>
+              <a:rPr lang="ko-KR" altLang="en-US" sz="1400" dirty="0"/>
+              <a:t>펀치로 날려버리기</a:t>
             </a:r>
             <a:endParaRPr lang="en-US" altLang="ko-KR" sz="1400" dirty="0"/>
           </a:p>
@@ -3648,26 +3674,25 @@
               </a:lnSpc>
             </a:pPr>
             <a:r>
-              <a:rPr lang="ko-KR" altLang="en-US" sz="1400" dirty="0"/>
-              <a:t>점프 </a:t>
-            </a:r>
-            <a:r>
-              <a:rPr lang="ko-KR" altLang="en-US" sz="1400" dirty="0" err="1"/>
-              <a:t>우클릭</a:t>
-            </a:r>
-            <a:r>
-              <a:rPr lang="ko-KR" altLang="en-US" sz="1400" dirty="0"/>
-              <a:t> </a:t>
-            </a:r>
-            <a:r>
-              <a:rPr lang="en-US" altLang="ko-KR" sz="1400" dirty="0"/>
-              <a:t>- </a:t>
-            </a:r>
-            <a:r>
-              <a:rPr lang="ko-KR" altLang="en-US" sz="1400" dirty="0" err="1"/>
-              <a:t>공중밟기</a:t>
-            </a:r>
-            <a:endParaRPr lang="en-US" altLang="ko-KR" sz="1400" dirty="0"/>
+              <a:rPr lang="en-US" altLang="ko-KR" sz="1400" dirty="0"/>
+              <a:t>Q – </a:t>
+            </a:r>
+            <a:r>
+              <a:rPr lang="ko-KR" altLang="en-US" sz="1400" dirty="0"/>
+              <a:t>전진성이 강한 무릎차기 </a:t>
+            </a:r>
+            <a:r>
+              <a:rPr lang="en-US" altLang="ko-KR" sz="1400" dirty="0"/>
+              <a:t>(KOF </a:t>
+            </a:r>
+            <a:r>
+              <a:rPr lang="ko-KR" altLang="en-US" sz="1400" dirty="0"/>
+              <a:t>죠</a:t>
+            </a:r>
+            <a:r>
+              <a:rPr lang="en-US" altLang="ko-KR" sz="1400" dirty="0"/>
+              <a:t>)</a:t>
+            </a:r>
           </a:p>
           <a:p>
             <a:pPr>
@@ -3676,60 +3701,20 @@
               </a:lnSpc>
             </a:pPr>
             <a:r>
-              <a:rPr lang="ko-KR" altLang="en-US" sz="1400" dirty="0" err="1"/>
-              <a:t>저스트가드</a:t>
-            </a:r>
-            <a:r>
-              <a:rPr lang="ko-KR" altLang="en-US" sz="1400" dirty="0"/>
-              <a:t> </a:t>
-            </a:r>
-            <a:r>
-              <a:rPr lang="en-US" altLang="ko-KR" sz="1400" dirty="0"/>
-              <a:t>- </a:t>
-            </a:r>
-            <a:r>
-              <a:rPr lang="ko-KR" altLang="en-US" sz="1400" dirty="0"/>
-              <a:t>펀치로 날려버리기</a:t>
-            </a:r>
-            <a:endParaRPr lang="en-US" altLang="ko-KR" sz="1400" dirty="0"/>
-          </a:p>
-          <a:p>
-            <a:pPr>
-              <a:lnSpc>
-                <a:spcPct val="150000"/>
-              </a:lnSpc>
-            </a:pPr>
-            <a:r>
-              <a:rPr lang="en-US" altLang="ko-KR" sz="1400" dirty="0"/>
-              <a:t>Q - </a:t>
-            </a:r>
-            <a:r>
-              <a:rPr lang="ko-KR" altLang="en-US" sz="1400" dirty="0"/>
-              <a:t>나이프를 던져 해당지점으로 순간이동</a:t>
-            </a:r>
-            <a:endParaRPr lang="en-US" altLang="ko-KR" sz="1400" dirty="0"/>
-          </a:p>
-          <a:p>
-            <a:pPr>
-              <a:lnSpc>
-                <a:spcPct val="150000"/>
-              </a:lnSpc>
-            </a:pPr>
-            <a:r>
-              <a:rPr lang="en-US" altLang="ko-KR" sz="1400" dirty="0"/>
-              <a:t>E - </a:t>
-            </a:r>
-            <a:r>
-              <a:rPr lang="ko-KR" altLang="en-US" sz="1400" dirty="0"/>
-              <a:t>나이프 </a:t>
+              <a:rPr lang="en-US" altLang="ko-KR" sz="1400" dirty="0"/>
+              <a:t>E – </a:t>
+            </a:r>
+            <a:r>
+              <a:rPr lang="ko-KR" altLang="en-US" sz="1400" dirty="0"/>
+              <a:t>발로 </a:t>
             </a:r>
             <a:r>
               <a:rPr lang="en-US" altLang="ko-KR" sz="1400" dirty="0"/>
               <a:t>3</a:t>
             </a:r>
             <a:r>
-              <a:rPr lang="ko-KR" altLang="en-US" sz="1400" dirty="0"/>
-              <a:t>개 발사</a:t>
+              <a:rPr lang="ko-KR" altLang="en-US" sz="1400"/>
+              <a:t>연타</a:t>
             </a:r>
             <a:endParaRPr lang="en-US" altLang="ko-KR" sz="1400" dirty="0"/>
           </a:p>
@@ -3770,7 +3755,7 @@
     </p:spTree>
     <p:extLst>
       <p:ext uri="{BB962C8B-B14F-4D97-AF65-F5344CB8AC3E}">
-        <p14:creationId xmlns:p14="http://schemas.microsoft.com/office/powerpoint/2010/main" val="2524793857"/>
+        <p14:creationId xmlns:p14="http://schemas.microsoft.com/office/powerpoint/2010/main" val="915892371"/>
       </p:ext>
     </p:extLst>
   </p:cSld>
@@ -3781,6 +3766,724 @@
 </file>
 
 <file path=ppt/slides/slide2.xml><?xml version="1.0" encoding="utf-8"?>
+<p:sld xmlns:a="http://schemas.openxmlformats.org/drawingml/2006/main" xmlns:r="http://schemas.openxmlformats.org/officeDocument/2006/relationships" xmlns:p="http://schemas.openxmlformats.org/presentationml/2006/main">
+  <p:cSld>
+    <p:spTree>
+      <p:nvGrpSpPr>
+        <p:cNvPr id="1" name="">
+          <a:extLst>
+            <a:ext uri="{FF2B5EF4-FFF2-40B4-BE49-F238E27FC236}">
+              <a16:creationId xmlns:a16="http://schemas.microsoft.com/office/drawing/2014/main" id="{2CFFD80B-BF46-1152-3732-881A7BE8F997}"/>
+            </a:ext>
+          </a:extLst>
+        </p:cNvPr>
+        <p:cNvGrpSpPr/>
+        <p:nvPr/>
+      </p:nvGrpSpPr>
+      <p:grpSpPr>
+        <a:xfrm>
+          <a:off x="0" y="0"/>
+          <a:ext cx="0" cy="0"/>
+          <a:chOff x="0" y="0"/>
+          <a:chExt cx="0" cy="0"/>
+        </a:xfrm>
+      </p:grpSpPr>
+      <p:sp>
+        <p:nvSpPr>
+          <p:cNvPr id="4" name="제목 1">
+            <a:extLst>
+              <a:ext uri="{FF2B5EF4-FFF2-40B4-BE49-F238E27FC236}">
+                <a16:creationId xmlns:a16="http://schemas.microsoft.com/office/drawing/2014/main" id="{B0D78FB7-BB8E-EE0F-7391-D7BC36CDE1D9}"/>
+              </a:ext>
+            </a:extLst>
+          </p:cNvPr>
+          <p:cNvSpPr txBox="1">
+            <a:spLocks/>
+          </p:cNvSpPr>
+          <p:nvPr/>
+        </p:nvSpPr>
+        <p:spPr>
+          <a:xfrm>
+            <a:off x="130679" y="98679"/>
+            <a:ext cx="10515600" cy="590651"/>
+          </a:xfrm>
+          <a:prstGeom prst="rect">
+            <a:avLst/>
+          </a:prstGeom>
+        </p:spPr>
+        <p:txBody>
+          <a:bodyPr vert="horz" lIns="91440" tIns="45720" rIns="91440" bIns="45720" rtlCol="0" anchor="ctr">
+            <a:normAutofit/>
+          </a:bodyPr>
+          <a:lstStyle>
+            <a:lvl1pPr algn="ctr" defTabSz="914400" rtl="0" eaLnBrk="1" latinLnBrk="1" hangingPunct="1">
+              <a:lnSpc>
+                <a:spcPct val="90000"/>
+              </a:lnSpc>
+              <a:spcBef>
+                <a:spcPct val="0"/>
+              </a:spcBef>
+              <a:buNone/>
+              <a:defRPr sz="6000" kern="1200">
+                <a:solidFill>
+                  <a:schemeClr val="tx1"/>
+                </a:solidFill>
+                <a:latin typeface="+mj-lt"/>
+                <a:ea typeface="+mj-ea"/>
+                <a:cs typeface="+mj-cs"/>
+              </a:defRPr>
+            </a:lvl1pPr>
+          </a:lstStyle>
+          <a:p>
+            <a:pPr algn="l"/>
+            <a:r>
+              <a:rPr lang="ko-KR" altLang="en-US" sz="2800" b="1" dirty="0">
+                <a:latin typeface="+mn-ea"/>
+                <a:ea typeface="+mn-ea"/>
+              </a:rPr>
+              <a:t>캐릭터 </a:t>
+            </a:r>
+            <a:r>
+              <a:rPr lang="en-US" altLang="ko-KR" sz="2800" b="1" dirty="0">
+                <a:latin typeface="+mn-ea"/>
+                <a:ea typeface="+mn-ea"/>
+              </a:rPr>
+              <a:t>- </a:t>
+            </a:r>
+            <a:r>
+              <a:rPr lang="ko-KR" altLang="en-US" sz="2800" b="1" dirty="0">
+                <a:latin typeface="+mn-ea"/>
+                <a:ea typeface="+mn-ea"/>
+              </a:rPr>
+              <a:t>검사</a:t>
+            </a:r>
+          </a:p>
+        </p:txBody>
+      </p:sp>
+      <p:sp>
+        <p:nvSpPr>
+          <p:cNvPr id="12" name="TextBox 11">
+            <a:extLst>
+              <a:ext uri="{FF2B5EF4-FFF2-40B4-BE49-F238E27FC236}">
+                <a16:creationId xmlns:a16="http://schemas.microsoft.com/office/drawing/2014/main" id="{67D6B94C-683E-CB70-294B-8966B903787C}"/>
+              </a:ext>
+            </a:extLst>
+          </p:cNvPr>
+          <p:cNvSpPr txBox="1"/>
+          <p:nvPr/>
+        </p:nvSpPr>
+        <p:spPr>
+          <a:xfrm>
+            <a:off x="551088" y="981323"/>
+            <a:ext cx="11221811" cy="4251870"/>
+          </a:xfrm>
+          <a:prstGeom prst="rect">
+            <a:avLst/>
+          </a:prstGeom>
+          <a:noFill/>
+        </p:spPr>
+        <p:txBody>
+          <a:bodyPr wrap="square" rtlCol="0">
+            <a:spAutoFit/>
+          </a:bodyPr>
+          <a:lstStyle/>
+          <a:p>
+            <a:pPr>
+              <a:lnSpc>
+                <a:spcPct val="150000"/>
+              </a:lnSpc>
+            </a:pPr>
+            <a:r>
+              <a:rPr lang="ko-KR" altLang="en-US" sz="1400" dirty="0"/>
+              <a:t>강한 공격력과 지속력 </a:t>
+            </a:r>
+            <a:r>
+              <a:rPr lang="en-US" altLang="ko-KR" sz="1400" dirty="0"/>
+              <a:t>/ </a:t>
+            </a:r>
+            <a:r>
+              <a:rPr lang="ko-KR" altLang="en-US" sz="1400" dirty="0"/>
+              <a:t>대군 상대로 강함</a:t>
+            </a:r>
+            <a:endParaRPr lang="en-US" altLang="ko-KR" sz="1400" dirty="0"/>
+          </a:p>
+          <a:p>
+            <a:pPr>
+              <a:lnSpc>
+                <a:spcPct val="150000"/>
+              </a:lnSpc>
+            </a:pPr>
+            <a:endParaRPr lang="en-US" altLang="ko-KR" sz="1400" dirty="0"/>
+          </a:p>
+          <a:p>
+            <a:pPr>
+              <a:lnSpc>
+                <a:spcPct val="150000"/>
+              </a:lnSpc>
+            </a:pPr>
+            <a:r>
+              <a:rPr lang="ko-KR" altLang="en-US" sz="1400" dirty="0"/>
+              <a:t>액션</a:t>
+            </a:r>
+            <a:endParaRPr lang="en-US" altLang="ko-KR" sz="1400" dirty="0"/>
+          </a:p>
+          <a:p>
+            <a:pPr>
+              <a:lnSpc>
+                <a:spcPct val="150000"/>
+              </a:lnSpc>
+            </a:pPr>
+            <a:r>
+              <a:rPr lang="ko-KR" altLang="en-US" sz="1400" dirty="0" err="1"/>
+              <a:t>왼클릭</a:t>
+            </a:r>
+            <a:r>
+              <a:rPr lang="ko-KR" altLang="en-US" sz="1400" dirty="0"/>
+              <a:t> </a:t>
+            </a:r>
+            <a:r>
+              <a:rPr lang="en-US" altLang="ko-KR" sz="1400" dirty="0"/>
+              <a:t>- </a:t>
+            </a:r>
+            <a:r>
+              <a:rPr lang="ko-KR" altLang="en-US" sz="1400" dirty="0"/>
+              <a:t>연속 </a:t>
+            </a:r>
+            <a:r>
+              <a:rPr lang="en-US" altLang="ko-KR" sz="1400" dirty="0"/>
+              <a:t>3</a:t>
+            </a:r>
+            <a:r>
+              <a:rPr lang="ko-KR" altLang="en-US" sz="1400" dirty="0"/>
+              <a:t>타</a:t>
+            </a:r>
+            <a:endParaRPr lang="en-US" altLang="ko-KR" sz="1400" dirty="0"/>
+          </a:p>
+          <a:p>
+            <a:pPr>
+              <a:lnSpc>
+                <a:spcPct val="150000"/>
+              </a:lnSpc>
+            </a:pPr>
+            <a:r>
+              <a:rPr lang="ko-KR" altLang="en-US" sz="1400" dirty="0" err="1"/>
+              <a:t>전방대쉬</a:t>
+            </a:r>
+            <a:r>
+              <a:rPr lang="ko-KR" altLang="en-US" sz="1400" dirty="0"/>
+              <a:t> </a:t>
+            </a:r>
+            <a:r>
+              <a:rPr lang="en-US" altLang="ko-KR" sz="1400" dirty="0"/>
+              <a:t>- </a:t>
+            </a:r>
+            <a:r>
+              <a:rPr lang="ko-KR" altLang="en-US" sz="1400" dirty="0" err="1"/>
+              <a:t>강베기</a:t>
+            </a:r>
+            <a:endParaRPr lang="en-US" altLang="ko-KR" sz="1400" dirty="0"/>
+          </a:p>
+          <a:p>
+            <a:pPr>
+              <a:lnSpc>
+                <a:spcPct val="150000"/>
+              </a:lnSpc>
+            </a:pPr>
+            <a:r>
+              <a:rPr lang="ko-KR" altLang="en-US" sz="1400" dirty="0" err="1"/>
+              <a:t>사이드대쉬</a:t>
+            </a:r>
+            <a:r>
+              <a:rPr lang="ko-KR" altLang="en-US" sz="1400" dirty="0"/>
+              <a:t> </a:t>
+            </a:r>
+            <a:r>
+              <a:rPr lang="en-US" altLang="ko-KR" sz="1400" dirty="0"/>
+              <a:t>- </a:t>
+            </a:r>
+            <a:r>
+              <a:rPr lang="ko-KR" altLang="en-US" sz="1400" dirty="0" err="1"/>
+              <a:t>횡베기</a:t>
+            </a:r>
+            <a:endParaRPr lang="en-US" altLang="ko-KR" sz="1400" dirty="0"/>
+          </a:p>
+          <a:p>
+            <a:pPr>
+              <a:lnSpc>
+                <a:spcPct val="150000"/>
+              </a:lnSpc>
+            </a:pPr>
+            <a:r>
+              <a:rPr lang="ko-KR" altLang="en-US" sz="1400" dirty="0" err="1"/>
+              <a:t>후방대쉬</a:t>
+            </a:r>
+            <a:r>
+              <a:rPr lang="ko-KR" altLang="en-US" sz="1400" dirty="0"/>
+              <a:t> </a:t>
+            </a:r>
+            <a:r>
+              <a:rPr lang="en-US" altLang="ko-KR" sz="1400" dirty="0"/>
+              <a:t>- </a:t>
+            </a:r>
+            <a:r>
+              <a:rPr lang="ko-KR" altLang="en-US" sz="1400" dirty="0" err="1"/>
+              <a:t>종베기</a:t>
+            </a:r>
+            <a:endParaRPr lang="en-US" altLang="ko-KR" sz="1400" dirty="0"/>
+          </a:p>
+          <a:p>
+            <a:pPr>
+              <a:lnSpc>
+                <a:spcPct val="150000"/>
+              </a:lnSpc>
+            </a:pPr>
+            <a:r>
+              <a:rPr lang="ko-KR" altLang="en-US" sz="1400" dirty="0" err="1"/>
+              <a:t>우클릭</a:t>
+            </a:r>
+            <a:r>
+              <a:rPr lang="ko-KR" altLang="en-US" sz="1400" dirty="0"/>
+              <a:t> </a:t>
+            </a:r>
+            <a:r>
+              <a:rPr lang="en-US" altLang="ko-KR" sz="1400" dirty="0"/>
+              <a:t>- </a:t>
+            </a:r>
+            <a:r>
+              <a:rPr lang="ko-KR" altLang="en-US" sz="1400" dirty="0" err="1"/>
+              <a:t>베어넘기기</a:t>
+            </a:r>
+            <a:endParaRPr lang="en-US" altLang="ko-KR" sz="1400" dirty="0"/>
+          </a:p>
+          <a:p>
+            <a:pPr>
+              <a:lnSpc>
+                <a:spcPct val="150000"/>
+              </a:lnSpc>
+            </a:pPr>
+            <a:r>
+              <a:rPr lang="ko-KR" altLang="en-US" sz="1400" dirty="0"/>
+              <a:t>점프 </a:t>
+            </a:r>
+            <a:r>
+              <a:rPr lang="ko-KR" altLang="en-US" sz="1400" dirty="0" err="1"/>
+              <a:t>왼클릭</a:t>
+            </a:r>
+            <a:r>
+              <a:rPr lang="ko-KR" altLang="en-US" sz="1400" dirty="0"/>
+              <a:t> </a:t>
+            </a:r>
+            <a:r>
+              <a:rPr lang="en-US" altLang="ko-KR" sz="1400" dirty="0"/>
+              <a:t>- </a:t>
+            </a:r>
+            <a:r>
+              <a:rPr lang="ko-KR" altLang="en-US" sz="1400" dirty="0" err="1"/>
+              <a:t>공중베기</a:t>
+            </a:r>
+            <a:endParaRPr lang="en-US" altLang="ko-KR" sz="1400" dirty="0"/>
+          </a:p>
+          <a:p>
+            <a:pPr>
+              <a:lnSpc>
+                <a:spcPct val="150000"/>
+              </a:lnSpc>
+            </a:pPr>
+            <a:r>
+              <a:rPr lang="ko-KR" altLang="en-US" sz="1400" dirty="0"/>
+              <a:t>점프 </a:t>
+            </a:r>
+            <a:r>
+              <a:rPr lang="ko-KR" altLang="en-US" sz="1400" dirty="0" err="1"/>
+              <a:t>우클릭</a:t>
+            </a:r>
+            <a:r>
+              <a:rPr lang="ko-KR" altLang="en-US" sz="1400" dirty="0"/>
+              <a:t> </a:t>
+            </a:r>
+            <a:r>
+              <a:rPr lang="en-US" altLang="ko-KR" sz="1400" dirty="0"/>
+              <a:t>- </a:t>
+            </a:r>
+            <a:r>
+              <a:rPr lang="ko-KR" altLang="en-US" sz="1400" dirty="0" err="1"/>
+              <a:t>공중베기</a:t>
+            </a:r>
+            <a:r>
+              <a:rPr lang="en-US" altLang="ko-KR" sz="1400" dirty="0"/>
+              <a:t>2, </a:t>
+            </a:r>
+            <a:r>
+              <a:rPr lang="ko-KR" altLang="en-US" sz="1400" dirty="0" err="1"/>
+              <a:t>바운스</a:t>
+            </a:r>
+            <a:endParaRPr lang="en-US" altLang="ko-KR" sz="1400" dirty="0"/>
+          </a:p>
+          <a:p>
+            <a:pPr>
+              <a:lnSpc>
+                <a:spcPct val="150000"/>
+              </a:lnSpc>
+            </a:pPr>
+            <a:r>
+              <a:rPr lang="en-US" altLang="ko-KR" sz="1400" dirty="0"/>
+              <a:t>Q - </a:t>
+            </a:r>
+            <a:r>
+              <a:rPr lang="ko-KR" altLang="en-US" sz="1400" dirty="0"/>
+              <a:t>전진하며 </a:t>
+            </a:r>
+            <a:r>
+              <a:rPr lang="en-US" altLang="ko-KR" sz="1400" dirty="0"/>
+              <a:t>X </a:t>
+            </a:r>
+            <a:r>
+              <a:rPr lang="ko-KR" altLang="en-US" sz="1400" dirty="0"/>
+              <a:t>베기</a:t>
+            </a:r>
+            <a:endParaRPr lang="en-US" altLang="ko-KR" sz="1400" dirty="0"/>
+          </a:p>
+          <a:p>
+            <a:pPr>
+              <a:lnSpc>
+                <a:spcPct val="150000"/>
+              </a:lnSpc>
+            </a:pPr>
+            <a:r>
+              <a:rPr lang="en-US" altLang="ko-KR" sz="1400" dirty="0"/>
+              <a:t>E - </a:t>
+            </a:r>
+            <a:r>
+              <a:rPr lang="ko-KR" altLang="en-US" sz="1400" dirty="0"/>
+              <a:t>중거리 검기 발사</a:t>
+            </a:r>
+            <a:endParaRPr lang="en-US" altLang="ko-KR" sz="1400" dirty="0"/>
+          </a:p>
+          <a:p>
+            <a:pPr>
+              <a:lnSpc>
+                <a:spcPct val="150000"/>
+              </a:lnSpc>
+            </a:pPr>
+            <a:r>
+              <a:rPr lang="en-US" altLang="ko-KR" sz="1400" dirty="0"/>
+              <a:t>R - </a:t>
+            </a:r>
+            <a:r>
+              <a:rPr lang="ko-KR" altLang="en-US" sz="1400"/>
+              <a:t>품안에서 총 발사</a:t>
+            </a:r>
+            <a:endParaRPr lang="en-US" altLang="ko-KR" sz="1400" dirty="0"/>
+          </a:p>
+        </p:txBody>
+      </p:sp>
+    </p:spTree>
+    <p:extLst>
+      <p:ext uri="{BB962C8B-B14F-4D97-AF65-F5344CB8AC3E}">
+        <p14:creationId xmlns:p14="http://schemas.microsoft.com/office/powerpoint/2010/main" val="113737807"/>
+      </p:ext>
+    </p:extLst>
+  </p:cSld>
+  <p:clrMapOvr>
+    <a:masterClrMapping/>
+  </p:clrMapOvr>
+</p:sld>
+</file>
+
+<file path=ppt/slides/slide3.xml><?xml version="1.0" encoding="utf-8"?>
+<p:sld xmlns:a="http://schemas.openxmlformats.org/drawingml/2006/main" xmlns:r="http://schemas.openxmlformats.org/officeDocument/2006/relationships" xmlns:p="http://schemas.openxmlformats.org/presentationml/2006/main">
+  <p:cSld>
+    <p:spTree>
+      <p:nvGrpSpPr>
+        <p:cNvPr id="1" name="">
+          <a:extLst>
+            <a:ext uri="{FF2B5EF4-FFF2-40B4-BE49-F238E27FC236}">
+              <a16:creationId xmlns:a16="http://schemas.microsoft.com/office/drawing/2014/main" id="{7FEE0BFD-8892-C633-D3D9-FE746A8E68E8}"/>
+            </a:ext>
+          </a:extLst>
+        </p:cNvPr>
+        <p:cNvGrpSpPr/>
+        <p:nvPr/>
+      </p:nvGrpSpPr>
+      <p:grpSpPr>
+        <a:xfrm>
+          <a:off x="0" y="0"/>
+          <a:ext cx="0" cy="0"/>
+          <a:chOff x="0" y="0"/>
+          <a:chExt cx="0" cy="0"/>
+        </a:xfrm>
+      </p:grpSpPr>
+      <p:sp>
+        <p:nvSpPr>
+          <p:cNvPr id="4" name="제목 1">
+            <a:extLst>
+              <a:ext uri="{FF2B5EF4-FFF2-40B4-BE49-F238E27FC236}">
+                <a16:creationId xmlns:a16="http://schemas.microsoft.com/office/drawing/2014/main" id="{A0906540-C197-E5F3-12B5-B1CFA9C1A129}"/>
+              </a:ext>
+            </a:extLst>
+          </p:cNvPr>
+          <p:cNvSpPr txBox="1">
+            <a:spLocks/>
+          </p:cNvSpPr>
+          <p:nvPr/>
+        </p:nvSpPr>
+        <p:spPr>
+          <a:xfrm>
+            <a:off x="130679" y="98679"/>
+            <a:ext cx="10515600" cy="590651"/>
+          </a:xfrm>
+          <a:prstGeom prst="rect">
+            <a:avLst/>
+          </a:prstGeom>
+        </p:spPr>
+        <p:txBody>
+          <a:bodyPr vert="horz" lIns="91440" tIns="45720" rIns="91440" bIns="45720" rtlCol="0" anchor="ctr">
+            <a:normAutofit/>
+          </a:bodyPr>
+          <a:lstStyle>
+            <a:lvl1pPr algn="ctr" defTabSz="914400" rtl="0" eaLnBrk="1" latinLnBrk="1" hangingPunct="1">
+              <a:lnSpc>
+                <a:spcPct val="90000"/>
+              </a:lnSpc>
+              <a:spcBef>
+                <a:spcPct val="0"/>
+              </a:spcBef>
+              <a:buNone/>
+              <a:defRPr sz="6000" kern="1200">
+                <a:solidFill>
+                  <a:schemeClr val="tx1"/>
+                </a:solidFill>
+                <a:latin typeface="+mj-lt"/>
+                <a:ea typeface="+mj-ea"/>
+                <a:cs typeface="+mj-cs"/>
+              </a:defRPr>
+            </a:lvl1pPr>
+          </a:lstStyle>
+          <a:p>
+            <a:pPr algn="l"/>
+            <a:r>
+              <a:rPr lang="ko-KR" altLang="en-US" sz="2800" b="1" dirty="0">
+                <a:latin typeface="+mn-ea"/>
+                <a:ea typeface="+mn-ea"/>
+              </a:rPr>
+              <a:t>적</a:t>
+            </a:r>
+          </a:p>
+        </p:txBody>
+      </p:sp>
+      <p:sp>
+        <p:nvSpPr>
+          <p:cNvPr id="12" name="TextBox 11">
+            <a:extLst>
+              <a:ext uri="{FF2B5EF4-FFF2-40B4-BE49-F238E27FC236}">
+                <a16:creationId xmlns:a16="http://schemas.microsoft.com/office/drawing/2014/main" id="{A3396ED3-8776-68DB-98AB-77396F52F360}"/>
+              </a:ext>
+            </a:extLst>
+          </p:cNvPr>
+          <p:cNvSpPr txBox="1"/>
+          <p:nvPr/>
+        </p:nvSpPr>
+        <p:spPr>
+          <a:xfrm>
+            <a:off x="551088" y="981323"/>
+            <a:ext cx="11221811" cy="1989712"/>
+          </a:xfrm>
+          <a:prstGeom prst="rect">
+            <a:avLst/>
+          </a:prstGeom>
+          <a:noFill/>
+        </p:spPr>
+        <p:txBody>
+          <a:bodyPr wrap="square" rtlCol="0">
+            <a:spAutoFit/>
+          </a:bodyPr>
+          <a:lstStyle/>
+          <a:p>
+            <a:pPr>
+              <a:lnSpc>
+                <a:spcPct val="150000"/>
+              </a:lnSpc>
+            </a:pPr>
+            <a:r>
+              <a:rPr lang="ko-KR" altLang="en-US" sz="1400" dirty="0"/>
+              <a:t>보병형 </a:t>
+            </a:r>
+            <a:r>
+              <a:rPr lang="en-US" altLang="ko-KR" sz="1400" dirty="0"/>
+              <a:t>– </a:t>
+            </a:r>
+            <a:r>
+              <a:rPr lang="ko-KR" altLang="en-US" sz="1400" dirty="0"/>
+              <a:t>설원 주민</a:t>
+            </a:r>
+            <a:endParaRPr lang="en-US" altLang="ko-KR" sz="1400" dirty="0"/>
+          </a:p>
+          <a:p>
+            <a:pPr>
+              <a:lnSpc>
+                <a:spcPct val="150000"/>
+              </a:lnSpc>
+            </a:pPr>
+            <a:r>
+              <a:rPr lang="ko-KR" altLang="en-US" sz="1400" dirty="0"/>
+              <a:t>궁수형 </a:t>
+            </a:r>
+            <a:r>
+              <a:rPr lang="en-US" altLang="ko-KR" sz="1400" dirty="0"/>
+              <a:t>– </a:t>
+            </a:r>
+            <a:r>
+              <a:rPr lang="ko-KR" altLang="en-US" sz="1400" dirty="0"/>
+              <a:t>설원 궁수</a:t>
+            </a:r>
+            <a:endParaRPr lang="en-US" altLang="ko-KR" sz="1400" dirty="0"/>
+          </a:p>
+          <a:p>
+            <a:pPr>
+              <a:lnSpc>
+                <a:spcPct val="150000"/>
+              </a:lnSpc>
+            </a:pPr>
+            <a:r>
+              <a:rPr lang="ko-KR" altLang="en-US" sz="1400" dirty="0"/>
+              <a:t>타워형 </a:t>
+            </a:r>
+            <a:r>
+              <a:rPr lang="en-US" altLang="ko-KR" sz="1400" dirty="0"/>
+              <a:t>– </a:t>
+            </a:r>
+            <a:r>
+              <a:rPr lang="ko-KR" altLang="en-US" sz="1400" dirty="0"/>
+              <a:t>눈사람 가드 </a:t>
+            </a:r>
+            <a:r>
+              <a:rPr lang="en-US" altLang="ko-KR" sz="1400" dirty="0"/>
+              <a:t>(</a:t>
+            </a:r>
+            <a:r>
+              <a:rPr lang="ko-KR" altLang="en-US" sz="1400" dirty="0"/>
+              <a:t>소환 </a:t>
+            </a:r>
+            <a:r>
+              <a:rPr lang="en-US" altLang="ko-KR" sz="1400" dirty="0"/>
+              <a:t>: </a:t>
+            </a:r>
+            <a:r>
+              <a:rPr lang="ko-KR" altLang="en-US" sz="1400" dirty="0"/>
+              <a:t>눈사람</a:t>
+            </a:r>
+            <a:r>
+              <a:rPr lang="en-US" altLang="ko-KR" sz="1400" dirty="0"/>
+              <a:t>)</a:t>
+            </a:r>
+          </a:p>
+          <a:p>
+            <a:pPr>
+              <a:lnSpc>
+                <a:spcPct val="150000"/>
+              </a:lnSpc>
+            </a:pPr>
+            <a:r>
+              <a:rPr lang="ko-KR" altLang="en-US" sz="1400" dirty="0"/>
+              <a:t>환수형 </a:t>
+            </a:r>
+            <a:r>
+              <a:rPr lang="en-US" altLang="ko-KR" sz="1400" dirty="0"/>
+              <a:t>– </a:t>
+            </a:r>
+            <a:r>
+              <a:rPr lang="ko-KR" altLang="en-US" sz="1400" dirty="0"/>
+              <a:t>눈사람</a:t>
+            </a:r>
+            <a:endParaRPr lang="en-US" altLang="ko-KR" sz="1400" dirty="0"/>
+          </a:p>
+          <a:p>
+            <a:pPr>
+              <a:lnSpc>
+                <a:spcPct val="150000"/>
+              </a:lnSpc>
+            </a:pPr>
+            <a:r>
+              <a:rPr lang="ko-KR" altLang="en-US" sz="1400" dirty="0"/>
+              <a:t>요새형 </a:t>
+            </a:r>
+            <a:r>
+              <a:rPr lang="en-US" altLang="ko-KR" sz="1400" dirty="0"/>
+              <a:t>– </a:t>
+            </a:r>
+            <a:r>
+              <a:rPr lang="ko-KR" altLang="en-US" sz="1400" dirty="0"/>
+              <a:t>경비 요새 </a:t>
+            </a:r>
+            <a:r>
+              <a:rPr lang="en-US" altLang="ko-KR" sz="1400" dirty="0"/>
+              <a:t>(</a:t>
+            </a:r>
+            <a:r>
+              <a:rPr lang="ko-KR" altLang="en-US" sz="1400" dirty="0"/>
+              <a:t>소환 </a:t>
+            </a:r>
+            <a:r>
+              <a:rPr lang="en-US" altLang="ko-KR" sz="1400" dirty="0"/>
+              <a:t>: </a:t>
+            </a:r>
+            <a:r>
+              <a:rPr lang="ko-KR" altLang="en-US" sz="1400" dirty="0"/>
+              <a:t>설원 주민</a:t>
+            </a:r>
+            <a:r>
+              <a:rPr lang="en-US" altLang="ko-KR" sz="1400" dirty="0"/>
+              <a:t>, </a:t>
+            </a:r>
+            <a:r>
+              <a:rPr lang="ko-KR" altLang="en-US" sz="1400" dirty="0"/>
+              <a:t>설원 궁수</a:t>
+            </a:r>
+            <a:r>
+              <a:rPr lang="en-US" altLang="ko-KR" sz="1400" dirty="0"/>
+              <a:t>)</a:t>
+            </a:r>
+          </a:p>
+          <a:p>
+            <a:pPr>
+              <a:lnSpc>
+                <a:spcPct val="150000"/>
+              </a:lnSpc>
+            </a:pPr>
+            <a:r>
+              <a:rPr lang="ko-KR" altLang="en-US" sz="1400" dirty="0"/>
+              <a:t>대장형 </a:t>
+            </a:r>
+            <a:r>
+              <a:rPr lang="en-US" altLang="ko-KR" sz="1400" dirty="0"/>
+              <a:t>– </a:t>
+            </a:r>
+            <a:r>
+              <a:rPr lang="ko-KR" altLang="en-US" sz="1400" dirty="0"/>
+              <a:t>스노우 </a:t>
+            </a:r>
+            <a:r>
+              <a:rPr lang="ko-KR" altLang="en-US" sz="1400" dirty="0" err="1"/>
+              <a:t>골렘</a:t>
+            </a:r>
+            <a:endParaRPr lang="en-US" altLang="ko-KR" sz="1400" dirty="0"/>
+          </a:p>
+        </p:txBody>
+      </p:sp>
+    </p:spTree>
+    <p:extLst>
+      <p:ext uri="{BB962C8B-B14F-4D97-AF65-F5344CB8AC3E}">
+        <p14:creationId xmlns:p14="http://schemas.microsoft.com/office/powerpoint/2010/main" val="2753642043"/>
+      </p:ext>
+    </p:extLst>
+  </p:cSld>
+  <p:clrMapOvr>
+    <a:masterClrMapping/>
+  </p:clrMapOvr>
+</p:sld>
+</file>
+
+<file path=ppt/slides/slide4.xml><?xml version="1.0" encoding="utf-8"?>
 <p:sld xmlns:a="http://schemas.openxmlformats.org/drawingml/2006/main" xmlns:r="http://schemas.openxmlformats.org/officeDocument/2006/relationships" xmlns:p="http://schemas.openxmlformats.org/presentationml/2006/main">
   <p:cSld>
     <p:spTree>
@@ -3890,7 +4593,7 @@
         <p:spPr>
           <a:xfrm>
             <a:off x="551088" y="981323"/>
-            <a:ext cx="11221811" cy="4251870"/>
+            <a:ext cx="11221811" cy="4898200"/>
           </a:xfrm>
           <a:prstGeom prst="rect">
             <a:avLst/>
@@ -3949,8 +4652,12 @@
               </a:lnSpc>
             </a:pPr>
             <a:r>
-              <a:rPr lang="ko-KR" altLang="en-US" sz="1400" dirty="0"/>
-              <a:t>기본공격 </a:t>
+              <a:rPr lang="ko-KR" altLang="en-US" sz="1400" dirty="0" err="1"/>
+              <a:t>왼클릭</a:t>
+            </a:r>
+            <a:r>
+              <a:rPr lang="ko-KR" altLang="en-US" sz="1400" dirty="0"/>
+              <a:t> </a:t>
             </a:r>
             <a:r>
               <a:rPr lang="en-US" altLang="ko-KR" sz="1400" dirty="0"/>
@@ -3989,7 +4696,7 @@
             </a:pPr>
             <a:r>
               <a:rPr lang="ko-KR" altLang="en-US" sz="1400" dirty="0" err="1"/>
-              <a:t>대쉬공격</a:t>
+              <a:t>전방대쉬</a:t>
             </a:r>
             <a:r>
               <a:rPr lang="ko-KR" altLang="en-US" sz="1400" dirty="0"/>
@@ -3997,11 +4704,11 @@
             </a:r>
             <a:r>
               <a:rPr lang="en-US" altLang="ko-KR" sz="1400" dirty="0"/>
-              <a:t>– </a:t>
-            </a:r>
-            <a:r>
-              <a:rPr lang="ko-KR" altLang="en-US" sz="1400" dirty="0"/>
-              <a:t>돌려차기</a:t>
+              <a:t>- </a:t>
+            </a:r>
+            <a:r>
+              <a:rPr lang="ko-KR" altLang="en-US" sz="1400" dirty="0" err="1"/>
+              <a:t>붕권</a:t>
             </a:r>
             <a:endParaRPr lang="en-US" altLang="ko-KR" sz="1400" dirty="0"/>
           </a:p>
@@ -4012,16 +4719,8 @@
               </a:lnSpc>
             </a:pPr>
             <a:r>
-              <a:rPr lang="ko-KR" altLang="en-US" sz="1400" dirty="0"/>
-              <a:t>특수공격 </a:t>
-            </a:r>
-            <a:r>
-              <a:rPr lang="en-US" altLang="ko-KR" sz="1400" dirty="0"/>
-              <a:t>– </a:t>
-            </a:r>
-            <a:r>
               <a:rPr lang="ko-KR" altLang="en-US" sz="1400" dirty="0" err="1"/>
-              <a:t>바디블로</a:t>
+              <a:t>사이드대쉬</a:t>
             </a:r>
             <a:r>
               <a:rPr lang="ko-KR" altLang="en-US" sz="1400" dirty="0"/>
@@ -4029,16 +4728,13 @@
             </a:r>
             <a:r>
               <a:rPr lang="en-US" altLang="ko-KR" sz="1400" dirty="0"/>
-              <a:t>(</a:t>
-            </a:r>
-            <a:r>
-              <a:rPr lang="ko-KR" altLang="en-US" sz="1400" dirty="0"/>
-              <a:t>바닥에서 밀려남</a:t>
-            </a:r>
-            <a:r>
-              <a:rPr lang="en-US" altLang="ko-KR" sz="1400" dirty="0"/>
-              <a:t>)</a:t>
-            </a:r>
+              <a:t>- </a:t>
+            </a:r>
+            <a:r>
+              <a:rPr lang="ko-KR" altLang="en-US" sz="1400" dirty="0"/>
+              <a:t>돌려차기</a:t>
+            </a:r>
+            <a:endParaRPr lang="en-US" altLang="ko-KR" sz="1400" dirty="0"/>
           </a:p>
           <a:p>
             <a:pPr>
@@ -4047,12 +4743,8 @@
               </a:lnSpc>
             </a:pPr>
             <a:r>
-              <a:rPr lang="ko-KR" altLang="en-US" sz="1400" dirty="0"/>
-              <a:t>점프 </a:t>
-            </a:r>
-            <a:r>
               <a:rPr lang="ko-KR" altLang="en-US" sz="1400" dirty="0" err="1"/>
-              <a:t>왼클릭</a:t>
+              <a:t>후방대쉬</a:t>
             </a:r>
             <a:r>
               <a:rPr lang="ko-KR" altLang="en-US" sz="1400" dirty="0"/>
@@ -4060,11 +4752,11 @@
             </a:r>
             <a:r>
               <a:rPr lang="en-US" altLang="ko-KR" sz="1400" dirty="0"/>
-              <a:t>– </a:t>
-            </a:r>
-            <a:r>
-              <a:rPr lang="ko-KR" altLang="en-US" sz="1400" dirty="0"/>
-              <a:t>발차기</a:t>
+              <a:t>- </a:t>
+            </a:r>
+            <a:r>
+              <a:rPr lang="ko-KR" altLang="en-US" sz="1400" dirty="0"/>
+              <a:t>지면 내려찍기</a:t>
             </a:r>
             <a:endParaRPr lang="en-US" altLang="ko-KR" sz="1400" dirty="0"/>
           </a:p>
@@ -4075,10 +4767,6 @@
               </a:lnSpc>
             </a:pPr>
             <a:r>
-              <a:rPr lang="ko-KR" altLang="en-US" sz="1400" dirty="0"/>
-              <a:t>점프 </a:t>
-            </a:r>
-            <a:r>
               <a:rPr lang="ko-KR" altLang="en-US" sz="1400" dirty="0" err="1"/>
               <a:t>우클릭</a:t>
             </a:r>
@@ -4088,28 +4776,13 @@
             </a:r>
             <a:r>
               <a:rPr lang="en-US" altLang="ko-KR" sz="1400" dirty="0"/>
-              <a:t>– </a:t>
+              <a:t>- </a:t>
             </a:r>
             <a:r>
               <a:rPr lang="ko-KR" altLang="en-US" sz="1400" dirty="0" err="1"/>
-              <a:t>공중밟기</a:t>
-            </a:r>
-            <a:r>
-              <a:rPr lang="ko-KR" altLang="en-US" sz="1400" dirty="0"/>
-              <a:t> </a:t>
-            </a:r>
-            <a:r>
-              <a:rPr lang="en-US" altLang="ko-KR" sz="1400" dirty="0"/>
-              <a:t>(</a:t>
-            </a:r>
-            <a:r>
-              <a:rPr lang="ko-KR" altLang="en-US" sz="1400" dirty="0"/>
-              <a:t>적을 밟고 점프</a:t>
-            </a:r>
-            <a:r>
-              <a:rPr lang="en-US" altLang="ko-KR" sz="1400" dirty="0"/>
-              <a:t>)</a:t>
-            </a:r>
+              <a:t>날려차기</a:t>
+            </a:r>
+            <a:endParaRPr lang="en-US" altLang="ko-KR" sz="1400" dirty="0"/>
           </a:p>
           <a:p>
             <a:pPr>
@@ -4118,8 +4791,12 @@
               </a:lnSpc>
             </a:pPr>
             <a:r>
+              <a:rPr lang="ko-KR" altLang="en-US" sz="1400" dirty="0"/>
+              <a:t>점프 </a:t>
+            </a:r>
+            <a:r>
               <a:rPr lang="ko-KR" altLang="en-US" sz="1400" dirty="0" err="1"/>
-              <a:t>저스트가드</a:t>
+              <a:t>왼클릭</a:t>
             </a:r>
             <a:r>
               <a:rPr lang="ko-KR" altLang="en-US" sz="1400" dirty="0"/>
@@ -4127,11 +4804,11 @@
             </a:r>
             <a:r>
               <a:rPr lang="en-US" altLang="ko-KR" sz="1400" dirty="0"/>
-              <a:t>– </a:t>
-            </a:r>
-            <a:r>
-              <a:rPr lang="ko-KR" altLang="en-US" sz="1400" dirty="0"/>
-              <a:t>펀치로 날려버리기</a:t>
+              <a:t>- </a:t>
+            </a:r>
+            <a:r>
+              <a:rPr lang="ko-KR" altLang="en-US" sz="1400" dirty="0"/>
+              <a:t>발차기</a:t>
             </a:r>
             <a:endParaRPr lang="en-US" altLang="ko-KR" sz="1400" dirty="0"/>
           </a:p>
@@ -4142,25 +4819,26 @@
               </a:lnSpc>
             </a:pPr>
             <a:r>
-              <a:rPr lang="en-US" altLang="ko-KR" sz="1400" dirty="0"/>
-              <a:t>Q – </a:t>
-            </a:r>
-            <a:r>
-              <a:rPr lang="ko-KR" altLang="en-US" sz="1400" dirty="0"/>
-              <a:t>전진성이 강한 무릎차기 </a:t>
-            </a:r>
-            <a:r>
-              <a:rPr lang="en-US" altLang="ko-KR" sz="1400" dirty="0"/>
-              <a:t>(KOF </a:t>
-            </a:r>
-            <a:r>
-              <a:rPr lang="ko-KR" altLang="en-US" sz="1400" dirty="0"/>
-              <a:t>죠</a:t>
-            </a:r>
-            <a:r>
-              <a:rPr lang="en-US" altLang="ko-KR" sz="1400" dirty="0"/>
-              <a:t>)</a:t>
-            </a:r>
+              <a:rPr lang="ko-KR" altLang="en-US" sz="1400" dirty="0"/>
+              <a:t>점프 </a:t>
+            </a:r>
+            <a:r>
+              <a:rPr lang="ko-KR" altLang="en-US" sz="1400" dirty="0" err="1"/>
+              <a:t>우클릭</a:t>
+            </a:r>
+            <a:r>
+              <a:rPr lang="ko-KR" altLang="en-US" sz="1400" dirty="0"/>
+              <a:t> </a:t>
+            </a:r>
+            <a:r>
+              <a:rPr lang="en-US" altLang="ko-KR" sz="1400" dirty="0"/>
+              <a:t>- </a:t>
+            </a:r>
+            <a:r>
+              <a:rPr lang="ko-KR" altLang="en-US" sz="1400" dirty="0" err="1"/>
+              <a:t>공중밟기</a:t>
+            </a:r>
+            <a:endParaRPr lang="en-US" altLang="ko-KR" sz="1400" dirty="0"/>
           </a:p>
           <a:p>
             <a:pPr>
@@ -4169,20 +4847,60 @@
               </a:lnSpc>
             </a:pPr>
             <a:r>
-              <a:rPr lang="en-US" altLang="ko-KR" sz="1400" dirty="0"/>
-              <a:t>E – </a:t>
-            </a:r>
-            <a:r>
-              <a:rPr lang="ko-KR" altLang="en-US" sz="1400" dirty="0"/>
-              <a:t>발로 </a:t>
+              <a:rPr lang="ko-KR" altLang="en-US" sz="1400" dirty="0" err="1"/>
+              <a:t>저스트가드</a:t>
+            </a:r>
+            <a:r>
+              <a:rPr lang="ko-KR" altLang="en-US" sz="1400" dirty="0"/>
+              <a:t> </a:t>
+            </a:r>
+            <a:r>
+              <a:rPr lang="en-US" altLang="ko-KR" sz="1400" dirty="0"/>
+              <a:t>- </a:t>
+            </a:r>
+            <a:r>
+              <a:rPr lang="ko-KR" altLang="en-US" sz="1400" dirty="0"/>
+              <a:t>펀치로 날려버리기</a:t>
+            </a:r>
+            <a:endParaRPr lang="en-US" altLang="ko-KR" sz="1400" dirty="0"/>
+          </a:p>
+          <a:p>
+            <a:pPr>
+              <a:lnSpc>
+                <a:spcPct val="150000"/>
+              </a:lnSpc>
+            </a:pPr>
+            <a:r>
+              <a:rPr lang="en-US" altLang="ko-KR" sz="1400" dirty="0"/>
+              <a:t>Q - </a:t>
+            </a:r>
+            <a:r>
+              <a:rPr lang="ko-KR" altLang="en-US" sz="1400" dirty="0"/>
+              <a:t>나이프를 던져 해당지점으로 순간이동</a:t>
+            </a:r>
+            <a:endParaRPr lang="en-US" altLang="ko-KR" sz="1400" dirty="0"/>
+          </a:p>
+          <a:p>
+            <a:pPr>
+              <a:lnSpc>
+                <a:spcPct val="150000"/>
+              </a:lnSpc>
+            </a:pPr>
+            <a:r>
+              <a:rPr lang="en-US" altLang="ko-KR" sz="1400" dirty="0"/>
+              <a:t>E - </a:t>
+            </a:r>
+            <a:r>
+              <a:rPr lang="ko-KR" altLang="en-US" sz="1400" dirty="0"/>
+              <a:t>나이프 </a:t>
             </a:r>
             <a:r>
               <a:rPr lang="en-US" altLang="ko-KR" sz="1400" dirty="0"/>
               <a:t>3</a:t>
             </a:r>
             <a:r>
-              <a:rPr lang="ko-KR" altLang="en-US" sz="1400"/>
-              <a:t>연타</a:t>
+              <a:rPr lang="ko-KR" altLang="en-US" sz="1400" dirty="0"/>
+              <a:t>개 발사</a:t>
             </a:r>
             <a:endParaRPr lang="en-US" altLang="ko-KR" sz="1400" dirty="0"/>
           </a:p>
@@ -4223,725 +4941,7 @@
     </p:spTree>
     <p:extLst>
       <p:ext uri="{BB962C8B-B14F-4D97-AF65-F5344CB8AC3E}">
-        <p14:creationId xmlns:p14="http://schemas.microsoft.com/office/powerpoint/2010/main" val="915892371"/>
-      </p:ext>
-    </p:extLst>
-  </p:cSld>
-  <p:clrMapOvr>
-    <a:masterClrMapping/>
-  </p:clrMapOvr>
-</p:sld>
-</file>
-
-<file path=ppt/slides/slide3.xml><?xml version="1.0" encoding="utf-8"?>
-<p:sld xmlns:a="http://schemas.openxmlformats.org/drawingml/2006/main" xmlns:r="http://schemas.openxmlformats.org/officeDocument/2006/relationships" xmlns:p="http://schemas.openxmlformats.org/presentationml/2006/main">
-  <p:cSld>
-    <p:spTree>
-      <p:nvGrpSpPr>
-        <p:cNvPr id="1" name="">
-          <a:extLst>
-            <a:ext uri="{FF2B5EF4-FFF2-40B4-BE49-F238E27FC236}">
-              <a16:creationId xmlns:a16="http://schemas.microsoft.com/office/drawing/2014/main" id="{2CFFD80B-BF46-1152-3732-881A7BE8F997}"/>
-            </a:ext>
-          </a:extLst>
-        </p:cNvPr>
-        <p:cNvGrpSpPr/>
-        <p:nvPr/>
-      </p:nvGrpSpPr>
-      <p:grpSpPr>
-        <a:xfrm>
-          <a:off x="0" y="0"/>
-          <a:ext cx="0" cy="0"/>
-          <a:chOff x="0" y="0"/>
-          <a:chExt cx="0" cy="0"/>
-        </a:xfrm>
-      </p:grpSpPr>
-      <p:sp>
-        <p:nvSpPr>
-          <p:cNvPr id="4" name="제목 1">
-            <a:extLst>
-              <a:ext uri="{FF2B5EF4-FFF2-40B4-BE49-F238E27FC236}">
-                <a16:creationId xmlns:a16="http://schemas.microsoft.com/office/drawing/2014/main" id="{B0D78FB7-BB8E-EE0F-7391-D7BC36CDE1D9}"/>
-              </a:ext>
-            </a:extLst>
-          </p:cNvPr>
-          <p:cNvSpPr txBox="1">
-            <a:spLocks/>
-          </p:cNvSpPr>
-          <p:nvPr/>
-        </p:nvSpPr>
-        <p:spPr>
-          <a:xfrm>
-            <a:off x="130679" y="98679"/>
-            <a:ext cx="10515600" cy="590651"/>
-          </a:xfrm>
-          <a:prstGeom prst="rect">
-            <a:avLst/>
-          </a:prstGeom>
-        </p:spPr>
-        <p:txBody>
-          <a:bodyPr vert="horz" lIns="91440" tIns="45720" rIns="91440" bIns="45720" rtlCol="0" anchor="ctr">
-            <a:normAutofit/>
-          </a:bodyPr>
-          <a:lstStyle>
-            <a:lvl1pPr algn="ctr" defTabSz="914400" rtl="0" eaLnBrk="1" latinLnBrk="1" hangingPunct="1">
-              <a:lnSpc>
-                <a:spcPct val="90000"/>
-              </a:lnSpc>
-              <a:spcBef>
-                <a:spcPct val="0"/>
-              </a:spcBef>
-              <a:buNone/>
-              <a:defRPr sz="6000" kern="1200">
-                <a:solidFill>
-                  <a:schemeClr val="tx1"/>
-                </a:solidFill>
-                <a:latin typeface="+mj-lt"/>
-                <a:ea typeface="+mj-ea"/>
-                <a:cs typeface="+mj-cs"/>
-              </a:defRPr>
-            </a:lvl1pPr>
-          </a:lstStyle>
-          <a:p>
-            <a:pPr algn="l"/>
-            <a:r>
-              <a:rPr lang="ko-KR" altLang="en-US" sz="2800" b="1" dirty="0">
-                <a:latin typeface="+mn-ea"/>
-                <a:ea typeface="+mn-ea"/>
-              </a:rPr>
-              <a:t>캐릭터 </a:t>
-            </a:r>
-            <a:r>
-              <a:rPr lang="en-US" altLang="ko-KR" sz="2800" b="1" dirty="0">
-                <a:latin typeface="+mn-ea"/>
-                <a:ea typeface="+mn-ea"/>
-              </a:rPr>
-              <a:t>- </a:t>
-            </a:r>
-            <a:r>
-              <a:rPr lang="ko-KR" altLang="en-US" sz="2800" b="1" dirty="0">
-                <a:latin typeface="+mn-ea"/>
-                <a:ea typeface="+mn-ea"/>
-              </a:rPr>
-              <a:t>검사</a:t>
-            </a:r>
-          </a:p>
-        </p:txBody>
-      </p:sp>
-      <p:sp>
-        <p:nvSpPr>
-          <p:cNvPr id="12" name="TextBox 11">
-            <a:extLst>
-              <a:ext uri="{FF2B5EF4-FFF2-40B4-BE49-F238E27FC236}">
-                <a16:creationId xmlns:a16="http://schemas.microsoft.com/office/drawing/2014/main" id="{67D6B94C-683E-CB70-294B-8966B903787C}"/>
-              </a:ext>
-            </a:extLst>
-          </p:cNvPr>
-          <p:cNvSpPr txBox="1"/>
-          <p:nvPr/>
-        </p:nvSpPr>
-        <p:spPr>
-          <a:xfrm>
-            <a:off x="551088" y="981323"/>
-            <a:ext cx="11221811" cy="4251870"/>
-          </a:xfrm>
-          <a:prstGeom prst="rect">
-            <a:avLst/>
-          </a:prstGeom>
-          <a:noFill/>
-        </p:spPr>
-        <p:txBody>
-          <a:bodyPr wrap="square" rtlCol="0">
-            <a:spAutoFit/>
-          </a:bodyPr>
-          <a:lstStyle/>
-          <a:p>
-            <a:pPr>
-              <a:lnSpc>
-                <a:spcPct val="150000"/>
-              </a:lnSpc>
-            </a:pPr>
-            <a:r>
-              <a:rPr lang="ko-KR" altLang="en-US" sz="1400" dirty="0"/>
-              <a:t>강한 공격력과 지속력 </a:t>
-            </a:r>
-            <a:r>
-              <a:rPr lang="en-US" altLang="ko-KR" sz="1400" dirty="0"/>
-              <a:t>/ </a:t>
-            </a:r>
-            <a:r>
-              <a:rPr lang="ko-KR" altLang="en-US" sz="1400" dirty="0"/>
-              <a:t>대군 상대로 강함</a:t>
-            </a:r>
-            <a:endParaRPr lang="en-US" altLang="ko-KR" sz="1400" dirty="0"/>
-          </a:p>
-          <a:p>
-            <a:pPr>
-              <a:lnSpc>
-                <a:spcPct val="150000"/>
-              </a:lnSpc>
-            </a:pPr>
-            <a:endParaRPr lang="en-US" altLang="ko-KR" sz="1400" dirty="0"/>
-          </a:p>
-          <a:p>
-            <a:pPr>
-              <a:lnSpc>
-                <a:spcPct val="150000"/>
-              </a:lnSpc>
-            </a:pPr>
-            <a:r>
-              <a:rPr lang="ko-KR" altLang="en-US" sz="1400" dirty="0"/>
-              <a:t>액션</a:t>
-            </a:r>
-            <a:endParaRPr lang="en-US" altLang="ko-KR" sz="1400" dirty="0"/>
-          </a:p>
-          <a:p>
-            <a:pPr>
-              <a:lnSpc>
-                <a:spcPct val="150000"/>
-              </a:lnSpc>
-            </a:pPr>
-            <a:r>
-              <a:rPr lang="ko-KR" altLang="en-US" sz="1400" dirty="0" err="1"/>
-              <a:t>왼클릭</a:t>
-            </a:r>
-            <a:r>
-              <a:rPr lang="ko-KR" altLang="en-US" sz="1400" dirty="0"/>
-              <a:t> </a:t>
-            </a:r>
-            <a:r>
-              <a:rPr lang="en-US" altLang="ko-KR" sz="1400" dirty="0"/>
-              <a:t>- </a:t>
-            </a:r>
-            <a:r>
-              <a:rPr lang="ko-KR" altLang="en-US" sz="1400" dirty="0"/>
-              <a:t>연속 </a:t>
-            </a:r>
-            <a:r>
-              <a:rPr lang="en-US" altLang="ko-KR" sz="1400" dirty="0"/>
-              <a:t>3</a:t>
-            </a:r>
-            <a:r>
-              <a:rPr lang="ko-KR" altLang="en-US" sz="1400" dirty="0"/>
-              <a:t>타</a:t>
-            </a:r>
-            <a:endParaRPr lang="en-US" altLang="ko-KR" sz="1400" dirty="0"/>
-          </a:p>
-          <a:p>
-            <a:pPr>
-              <a:lnSpc>
-                <a:spcPct val="150000"/>
-              </a:lnSpc>
-            </a:pPr>
-            <a:r>
-              <a:rPr lang="ko-KR" altLang="en-US" sz="1400" dirty="0" err="1"/>
-              <a:t>전방대쉬</a:t>
-            </a:r>
-            <a:r>
-              <a:rPr lang="ko-KR" altLang="en-US" sz="1400" dirty="0"/>
-              <a:t> </a:t>
-            </a:r>
-            <a:r>
-              <a:rPr lang="en-US" altLang="ko-KR" sz="1400" dirty="0"/>
-              <a:t>- </a:t>
-            </a:r>
-            <a:r>
-              <a:rPr lang="ko-KR" altLang="en-US" sz="1400" dirty="0" err="1"/>
-              <a:t>강베기</a:t>
-            </a:r>
-            <a:endParaRPr lang="en-US" altLang="ko-KR" sz="1400" dirty="0"/>
-          </a:p>
-          <a:p>
-            <a:pPr>
-              <a:lnSpc>
-                <a:spcPct val="150000"/>
-              </a:lnSpc>
-            </a:pPr>
-            <a:r>
-              <a:rPr lang="ko-KR" altLang="en-US" sz="1400" dirty="0" err="1"/>
-              <a:t>사이드대쉬</a:t>
-            </a:r>
-            <a:r>
-              <a:rPr lang="ko-KR" altLang="en-US" sz="1400" dirty="0"/>
-              <a:t> </a:t>
-            </a:r>
-            <a:r>
-              <a:rPr lang="en-US" altLang="ko-KR" sz="1400" dirty="0"/>
-              <a:t>- </a:t>
-            </a:r>
-            <a:r>
-              <a:rPr lang="ko-KR" altLang="en-US" sz="1400" dirty="0" err="1"/>
-              <a:t>횡베기</a:t>
-            </a:r>
-            <a:endParaRPr lang="en-US" altLang="ko-KR" sz="1400" dirty="0"/>
-          </a:p>
-          <a:p>
-            <a:pPr>
-              <a:lnSpc>
-                <a:spcPct val="150000"/>
-              </a:lnSpc>
-            </a:pPr>
-            <a:r>
-              <a:rPr lang="ko-KR" altLang="en-US" sz="1400" dirty="0" err="1"/>
-              <a:t>후방대쉬</a:t>
-            </a:r>
-            <a:r>
-              <a:rPr lang="ko-KR" altLang="en-US" sz="1400" dirty="0"/>
-              <a:t> </a:t>
-            </a:r>
-            <a:r>
-              <a:rPr lang="en-US" altLang="ko-KR" sz="1400" dirty="0"/>
-              <a:t>- </a:t>
-            </a:r>
-            <a:r>
-              <a:rPr lang="ko-KR" altLang="en-US" sz="1400" dirty="0" err="1"/>
-              <a:t>종베기</a:t>
-            </a:r>
-            <a:endParaRPr lang="en-US" altLang="ko-KR" sz="1400" dirty="0"/>
-          </a:p>
-          <a:p>
-            <a:pPr>
-              <a:lnSpc>
-                <a:spcPct val="150000"/>
-              </a:lnSpc>
-            </a:pPr>
-            <a:r>
-              <a:rPr lang="ko-KR" altLang="en-US" sz="1400" dirty="0" err="1"/>
-              <a:t>우클릭</a:t>
-            </a:r>
-            <a:r>
-              <a:rPr lang="ko-KR" altLang="en-US" sz="1400" dirty="0"/>
-              <a:t> </a:t>
-            </a:r>
-            <a:r>
-              <a:rPr lang="en-US" altLang="ko-KR" sz="1400" dirty="0"/>
-              <a:t>- </a:t>
-            </a:r>
-            <a:r>
-              <a:rPr lang="ko-KR" altLang="en-US" sz="1400" dirty="0" err="1"/>
-              <a:t>베어넘기기</a:t>
-            </a:r>
-            <a:endParaRPr lang="en-US" altLang="ko-KR" sz="1400" dirty="0"/>
-          </a:p>
-          <a:p>
-            <a:pPr>
-              <a:lnSpc>
-                <a:spcPct val="150000"/>
-              </a:lnSpc>
-            </a:pPr>
-            <a:r>
-              <a:rPr lang="ko-KR" altLang="en-US" sz="1400" dirty="0"/>
-              <a:t>점프 </a:t>
-            </a:r>
-            <a:r>
-              <a:rPr lang="ko-KR" altLang="en-US" sz="1400" dirty="0" err="1"/>
-              <a:t>왼클릭</a:t>
-            </a:r>
-            <a:r>
-              <a:rPr lang="ko-KR" altLang="en-US" sz="1400" dirty="0"/>
-              <a:t> </a:t>
-            </a:r>
-            <a:r>
-              <a:rPr lang="en-US" altLang="ko-KR" sz="1400" dirty="0"/>
-              <a:t>- </a:t>
-            </a:r>
-            <a:r>
-              <a:rPr lang="ko-KR" altLang="en-US" sz="1400" dirty="0" err="1"/>
-              <a:t>공중베기</a:t>
-            </a:r>
-            <a:endParaRPr lang="en-US" altLang="ko-KR" sz="1400" dirty="0"/>
-          </a:p>
-          <a:p>
-            <a:pPr>
-              <a:lnSpc>
-                <a:spcPct val="150000"/>
-              </a:lnSpc>
-            </a:pPr>
-            <a:r>
-              <a:rPr lang="ko-KR" altLang="en-US" sz="1400" dirty="0"/>
-              <a:t>점프 </a:t>
-            </a:r>
-            <a:r>
-              <a:rPr lang="ko-KR" altLang="en-US" sz="1400" dirty="0" err="1"/>
-              <a:t>우클릭</a:t>
-            </a:r>
-            <a:r>
-              <a:rPr lang="ko-KR" altLang="en-US" sz="1400" dirty="0"/>
-              <a:t> </a:t>
-            </a:r>
-            <a:r>
-              <a:rPr lang="en-US" altLang="ko-KR" sz="1400" dirty="0"/>
-              <a:t>- </a:t>
-            </a:r>
-            <a:r>
-              <a:rPr lang="ko-KR" altLang="en-US" sz="1400" dirty="0" err="1"/>
-              <a:t>공중베기</a:t>
-            </a:r>
-            <a:r>
-              <a:rPr lang="en-US" altLang="ko-KR" sz="1400" dirty="0"/>
-              <a:t>2, </a:t>
-            </a:r>
-            <a:r>
-              <a:rPr lang="ko-KR" altLang="en-US" sz="1400" dirty="0" err="1"/>
-              <a:t>바운스</a:t>
-            </a:r>
-            <a:endParaRPr lang="en-US" altLang="ko-KR" sz="1400" dirty="0"/>
-          </a:p>
-          <a:p>
-            <a:pPr>
-              <a:lnSpc>
-                <a:spcPct val="150000"/>
-              </a:lnSpc>
-            </a:pPr>
-            <a:r>
-              <a:rPr lang="en-US" altLang="ko-KR" sz="1400" dirty="0"/>
-              <a:t>Q - </a:t>
-            </a:r>
-            <a:r>
-              <a:rPr lang="ko-KR" altLang="en-US" sz="1400" dirty="0"/>
-              <a:t>전진하며 </a:t>
-            </a:r>
-            <a:r>
-              <a:rPr lang="en-US" altLang="ko-KR" sz="1400" dirty="0"/>
-              <a:t>X </a:t>
-            </a:r>
-            <a:r>
-              <a:rPr lang="ko-KR" altLang="en-US" sz="1400" dirty="0"/>
-              <a:t>베기</a:t>
-            </a:r>
-            <a:endParaRPr lang="en-US" altLang="ko-KR" sz="1400" dirty="0"/>
-          </a:p>
-          <a:p>
-            <a:pPr>
-              <a:lnSpc>
-                <a:spcPct val="150000"/>
-              </a:lnSpc>
-            </a:pPr>
-            <a:r>
-              <a:rPr lang="en-US" altLang="ko-KR" sz="1400" dirty="0"/>
-              <a:t>E - </a:t>
-            </a:r>
-            <a:r>
-              <a:rPr lang="ko-KR" altLang="en-US" sz="1400" dirty="0"/>
-              <a:t>중거리 검기 발사</a:t>
-            </a:r>
-            <a:endParaRPr lang="en-US" altLang="ko-KR" sz="1400" dirty="0"/>
-          </a:p>
-          <a:p>
-            <a:pPr>
-              <a:lnSpc>
-                <a:spcPct val="150000"/>
-              </a:lnSpc>
-            </a:pPr>
-            <a:r>
-              <a:rPr lang="en-US" altLang="ko-KR" sz="1400" dirty="0"/>
-              <a:t>R - </a:t>
-            </a:r>
-            <a:r>
-              <a:rPr lang="ko-KR" altLang="en-US" sz="1400"/>
-              <a:t>품안에서 총 발사</a:t>
-            </a:r>
-            <a:endParaRPr lang="en-US" altLang="ko-KR" sz="1400" dirty="0"/>
-          </a:p>
-        </p:txBody>
-      </p:sp>
-    </p:spTree>
-    <p:extLst>
-      <p:ext uri="{BB962C8B-B14F-4D97-AF65-F5344CB8AC3E}">
-        <p14:creationId xmlns:p14="http://schemas.microsoft.com/office/powerpoint/2010/main" val="113737807"/>
-      </p:ext>
-    </p:extLst>
-  </p:cSld>
-  <p:clrMapOvr>
-    <a:masterClrMapping/>
-  </p:clrMapOvr>
-</p:sld>
-</file>
-
-<file path=ppt/slides/slide4.xml><?xml version="1.0" encoding="utf-8"?>
-<p:sld xmlns:a="http://schemas.openxmlformats.org/drawingml/2006/main" xmlns:r="http://schemas.openxmlformats.org/officeDocument/2006/relationships" xmlns:p="http://schemas.openxmlformats.org/presentationml/2006/main">
-  <p:cSld>
-    <p:spTree>
-      <p:nvGrpSpPr>
-        <p:cNvPr id="1" name="">
-          <a:extLst>
-            <a:ext uri="{FF2B5EF4-FFF2-40B4-BE49-F238E27FC236}">
-              <a16:creationId xmlns:a16="http://schemas.microsoft.com/office/drawing/2014/main" id="{7FEE0BFD-8892-C633-D3D9-FE746A8E68E8}"/>
-            </a:ext>
-          </a:extLst>
-        </p:cNvPr>
-        <p:cNvGrpSpPr/>
-        <p:nvPr/>
-      </p:nvGrpSpPr>
-      <p:grpSpPr>
-        <a:xfrm>
-          <a:off x="0" y="0"/>
-          <a:ext cx="0" cy="0"/>
-          <a:chOff x="0" y="0"/>
-          <a:chExt cx="0" cy="0"/>
-        </a:xfrm>
-      </p:grpSpPr>
-      <p:sp>
-        <p:nvSpPr>
-          <p:cNvPr id="4" name="제목 1">
-            <a:extLst>
-              <a:ext uri="{FF2B5EF4-FFF2-40B4-BE49-F238E27FC236}">
-                <a16:creationId xmlns:a16="http://schemas.microsoft.com/office/drawing/2014/main" id="{A0906540-C197-E5F3-12B5-B1CFA9C1A129}"/>
-              </a:ext>
-            </a:extLst>
-          </p:cNvPr>
-          <p:cNvSpPr txBox="1">
-            <a:spLocks/>
-          </p:cNvSpPr>
-          <p:nvPr/>
-        </p:nvSpPr>
-        <p:spPr>
-          <a:xfrm>
-            <a:off x="130679" y="98679"/>
-            <a:ext cx="10515600" cy="590651"/>
-          </a:xfrm>
-          <a:prstGeom prst="rect">
-            <a:avLst/>
-          </a:prstGeom>
-        </p:spPr>
-        <p:txBody>
-          <a:bodyPr vert="horz" lIns="91440" tIns="45720" rIns="91440" bIns="45720" rtlCol="0" anchor="ctr">
-            <a:normAutofit/>
-          </a:bodyPr>
-          <a:lstStyle>
-            <a:lvl1pPr algn="ctr" defTabSz="914400" rtl="0" eaLnBrk="1" latinLnBrk="1" hangingPunct="1">
-              <a:lnSpc>
-                <a:spcPct val="90000"/>
-              </a:lnSpc>
-              <a:spcBef>
-                <a:spcPct val="0"/>
-              </a:spcBef>
-              <a:buNone/>
-              <a:defRPr sz="6000" kern="1200">
-                <a:solidFill>
-                  <a:schemeClr val="tx1"/>
-                </a:solidFill>
-                <a:latin typeface="+mj-lt"/>
-                <a:ea typeface="+mj-ea"/>
-                <a:cs typeface="+mj-cs"/>
-              </a:defRPr>
-            </a:lvl1pPr>
-          </a:lstStyle>
-          <a:p>
-            <a:pPr algn="l"/>
-            <a:r>
-              <a:rPr lang="ko-KR" altLang="en-US" sz="2800" b="1" dirty="0">
-                <a:latin typeface="+mn-ea"/>
-                <a:ea typeface="+mn-ea"/>
-              </a:rPr>
-              <a:t>적</a:t>
-            </a:r>
-          </a:p>
-        </p:txBody>
-      </p:sp>
-      <p:sp>
-        <p:nvSpPr>
-          <p:cNvPr id="12" name="TextBox 11">
-            <a:extLst>
-              <a:ext uri="{FF2B5EF4-FFF2-40B4-BE49-F238E27FC236}">
-                <a16:creationId xmlns:a16="http://schemas.microsoft.com/office/drawing/2014/main" id="{A3396ED3-8776-68DB-98AB-77396F52F360}"/>
-              </a:ext>
-            </a:extLst>
-          </p:cNvPr>
-          <p:cNvSpPr txBox="1"/>
-          <p:nvPr/>
-        </p:nvSpPr>
-        <p:spPr>
-          <a:xfrm>
-            <a:off x="551088" y="981323"/>
-            <a:ext cx="11221811" cy="1989712"/>
-          </a:xfrm>
-          <a:prstGeom prst="rect">
-            <a:avLst/>
-          </a:prstGeom>
-          <a:noFill/>
-        </p:spPr>
-        <p:txBody>
-          <a:bodyPr wrap="square" rtlCol="0">
-            <a:spAutoFit/>
-          </a:bodyPr>
-          <a:lstStyle/>
-          <a:p>
-            <a:pPr>
-              <a:lnSpc>
-                <a:spcPct val="150000"/>
-              </a:lnSpc>
-            </a:pPr>
-            <a:r>
-              <a:rPr lang="ko-KR" altLang="en-US" sz="1400" dirty="0"/>
-              <a:t>보병형 </a:t>
-            </a:r>
-            <a:r>
-              <a:rPr lang="en-US" altLang="ko-KR" sz="1400" dirty="0"/>
-              <a:t>– </a:t>
-            </a:r>
-            <a:r>
-              <a:rPr lang="ko-KR" altLang="en-US" sz="1400" dirty="0"/>
-              <a:t>설원 주민</a:t>
-            </a:r>
-            <a:endParaRPr lang="en-US" altLang="ko-KR" sz="1400" dirty="0"/>
-          </a:p>
-          <a:p>
-            <a:pPr>
-              <a:lnSpc>
-                <a:spcPct val="150000"/>
-              </a:lnSpc>
-            </a:pPr>
-            <a:r>
-              <a:rPr lang="ko-KR" altLang="en-US" sz="1400" dirty="0"/>
-              <a:t>궁수형 </a:t>
-            </a:r>
-            <a:r>
-              <a:rPr lang="en-US" altLang="ko-KR" sz="1400" dirty="0"/>
-              <a:t>– </a:t>
-            </a:r>
-            <a:r>
-              <a:rPr lang="ko-KR" altLang="en-US" sz="1400" dirty="0"/>
-              <a:t>설원 궁수</a:t>
-            </a:r>
-            <a:endParaRPr lang="en-US" altLang="ko-KR" sz="1400" dirty="0"/>
-          </a:p>
-          <a:p>
-            <a:pPr>
-              <a:lnSpc>
-                <a:spcPct val="150000"/>
-              </a:lnSpc>
-            </a:pPr>
-            <a:r>
-              <a:rPr lang="ko-KR" altLang="en-US" sz="1400" dirty="0"/>
-              <a:t>타워형 </a:t>
-            </a:r>
-            <a:r>
-              <a:rPr lang="en-US" altLang="ko-KR" sz="1400" dirty="0"/>
-              <a:t>– </a:t>
-            </a:r>
-            <a:r>
-              <a:rPr lang="ko-KR" altLang="en-US" sz="1400" dirty="0"/>
-              <a:t>눈사람 가드 </a:t>
-            </a:r>
-            <a:r>
-              <a:rPr lang="en-US" altLang="ko-KR" sz="1400" dirty="0"/>
-              <a:t>(</a:t>
-            </a:r>
-            <a:r>
-              <a:rPr lang="ko-KR" altLang="en-US" sz="1400" dirty="0"/>
-              <a:t>소환 </a:t>
-            </a:r>
-            <a:r>
-              <a:rPr lang="en-US" altLang="ko-KR" sz="1400" dirty="0"/>
-              <a:t>: </a:t>
-            </a:r>
-            <a:r>
-              <a:rPr lang="ko-KR" altLang="en-US" sz="1400" dirty="0"/>
-              <a:t>눈사람</a:t>
-            </a:r>
-            <a:r>
-              <a:rPr lang="en-US" altLang="ko-KR" sz="1400" dirty="0"/>
-              <a:t>)</a:t>
-            </a:r>
-          </a:p>
-          <a:p>
-            <a:pPr>
-              <a:lnSpc>
-                <a:spcPct val="150000"/>
-              </a:lnSpc>
-            </a:pPr>
-            <a:r>
-              <a:rPr lang="ko-KR" altLang="en-US" sz="1400" dirty="0"/>
-              <a:t>환수형 </a:t>
-            </a:r>
-            <a:r>
-              <a:rPr lang="en-US" altLang="ko-KR" sz="1400" dirty="0"/>
-              <a:t>– </a:t>
-            </a:r>
-            <a:r>
-              <a:rPr lang="ko-KR" altLang="en-US" sz="1400" dirty="0"/>
-              <a:t>눈사람</a:t>
-            </a:r>
-            <a:endParaRPr lang="en-US" altLang="ko-KR" sz="1400" dirty="0"/>
-          </a:p>
-          <a:p>
-            <a:pPr>
-              <a:lnSpc>
-                <a:spcPct val="150000"/>
-              </a:lnSpc>
-            </a:pPr>
-            <a:r>
-              <a:rPr lang="ko-KR" altLang="en-US" sz="1400" dirty="0"/>
-              <a:t>요새형 </a:t>
-            </a:r>
-            <a:r>
-              <a:rPr lang="en-US" altLang="ko-KR" sz="1400" dirty="0"/>
-              <a:t>– </a:t>
-            </a:r>
-            <a:r>
-              <a:rPr lang="ko-KR" altLang="en-US" sz="1400" dirty="0"/>
-              <a:t>경비 요새 </a:t>
-            </a:r>
-            <a:r>
-              <a:rPr lang="en-US" altLang="ko-KR" sz="1400" dirty="0"/>
-              <a:t>(</a:t>
-            </a:r>
-            <a:r>
-              <a:rPr lang="ko-KR" altLang="en-US" sz="1400" dirty="0"/>
-              <a:t>소환 </a:t>
-            </a:r>
-            <a:r>
-              <a:rPr lang="en-US" altLang="ko-KR" sz="1400" dirty="0"/>
-              <a:t>: </a:t>
-            </a:r>
-            <a:r>
-              <a:rPr lang="ko-KR" altLang="en-US" sz="1400" dirty="0"/>
-              <a:t>설원 주민</a:t>
-            </a:r>
-            <a:r>
-              <a:rPr lang="en-US" altLang="ko-KR" sz="1400" dirty="0"/>
-              <a:t>, </a:t>
-            </a:r>
-            <a:r>
-              <a:rPr lang="ko-KR" altLang="en-US" sz="1400" dirty="0"/>
-              <a:t>설원 궁수</a:t>
-            </a:r>
-            <a:r>
-              <a:rPr lang="en-US" altLang="ko-KR" sz="1400" dirty="0"/>
-              <a:t>)</a:t>
-            </a:r>
-          </a:p>
-          <a:p>
-            <a:pPr>
-              <a:lnSpc>
-                <a:spcPct val="150000"/>
-              </a:lnSpc>
-            </a:pPr>
-            <a:r>
-              <a:rPr lang="ko-KR" altLang="en-US" sz="1400" dirty="0"/>
-              <a:t>대장형 </a:t>
-            </a:r>
-            <a:r>
-              <a:rPr lang="en-US" altLang="ko-KR" sz="1400" dirty="0"/>
-              <a:t>– </a:t>
-            </a:r>
-            <a:r>
-              <a:rPr lang="ko-KR" altLang="en-US" sz="1400" dirty="0"/>
-              <a:t>스노우 </a:t>
-            </a:r>
-            <a:r>
-              <a:rPr lang="ko-KR" altLang="en-US" sz="1400" dirty="0" err="1"/>
-              <a:t>골렘</a:t>
-            </a:r>
-            <a:endParaRPr lang="en-US" altLang="ko-KR" sz="1400" dirty="0"/>
-          </a:p>
-        </p:txBody>
-      </p:sp>
-    </p:spTree>
-    <p:extLst>
-      <p:ext uri="{BB962C8B-B14F-4D97-AF65-F5344CB8AC3E}">
-        <p14:creationId xmlns:p14="http://schemas.microsoft.com/office/powerpoint/2010/main" val="2753642043"/>
+        <p14:creationId xmlns:p14="http://schemas.microsoft.com/office/powerpoint/2010/main" val="2524793857"/>
       </p:ext>
     </p:extLst>
   </p:cSld>
